--- a/Prateek_SQL_DQL_Select_Command.pptx
+++ b/Prateek_SQL_DQL_Select_Command.pptx
@@ -11,10 +11,10 @@
     <p:sldId id="256" r:id="rId2"/>
     <p:sldId id="257" r:id="rId3"/>
     <p:sldId id="258" r:id="rId4"/>
-    <p:sldId id="259" r:id="rId5"/>
-    <p:sldId id="260" r:id="rId6"/>
-    <p:sldId id="261" r:id="rId7"/>
-    <p:sldId id="262" r:id="rId8"/>
+    <p:sldId id="262" r:id="rId5"/>
+    <p:sldId id="259" r:id="rId6"/>
+    <p:sldId id="265" r:id="rId7"/>
+    <p:sldId id="264" r:id="rId8"/>
     <p:sldId id="263" r:id="rId9"/>
   </p:sldIdLst>
   <p:sldSz cx="9144000" cy="5143500" type="screen16x9"/>
@@ -119,10 +119,10 @@
             <p14:sldId id="256"/>
             <p14:sldId id="257"/>
             <p14:sldId id="258"/>
+            <p14:sldId id="262"/>
             <p14:sldId id="259"/>
-            <p14:sldId id="260"/>
-            <p14:sldId id="261"/>
-            <p14:sldId id="262"/>
+            <p14:sldId id="265"/>
+            <p14:sldId id="264"/>
             <p14:sldId id="263"/>
           </p14:sldIdLst>
         </p14:section>
@@ -133,6 +133,233 @@
     </p:ext>
   </p:extLst>
 </p:presentation>
+</file>
+
+<file path=ppt/revisionInfo.xml><?xml version="1.0" encoding="utf-8"?>
+<p1510:revInfo xmlns:a="http://schemas.openxmlformats.org/drawingml/2006/main" xmlns:r="http://schemas.openxmlformats.org/officeDocument/2006/relationships" xmlns:p1510="http://schemas.microsoft.com/office/powerpoint/2015/10/main">
+  <p1510:revLst>
+    <p1510:client id="{46305967-72E2-48E6-A51F-D184293B679D}" v="6" dt="2026-05-21T05:05:47.882"/>
+  </p1510:revLst>
+</p1510:revInfo>
+</file>
+
+<file path=ppt/changesInfos/changesInfo1.xml><?xml version="1.0" encoding="utf-8"?>
+<pc:chgInfo xmlns:a="http://schemas.openxmlformats.org/drawingml/2006/main" xmlns:r="http://schemas.openxmlformats.org/officeDocument/2006/relationships" xmlns:ac="http://schemas.microsoft.com/office/drawing/2013/main/command" xmlns:pc="http://schemas.microsoft.com/office/powerpoint/2013/main/command">
+  <pc:docChgLst>
+    <pc:chgData name="Prateek Gupta" userId="e2c2300c30275623" providerId="LiveId" clId="{86F74277-42E8-4C62-8B8A-50731E646123}"/>
+    <pc:docChg chg="undo custSel addSld delSld modSld sldOrd modSection">
+      <pc:chgData name="Prateek Gupta" userId="e2c2300c30275623" providerId="LiveId" clId="{86F74277-42E8-4C62-8B8A-50731E646123}" dt="2026-05-21T06:15:49.807" v="166" actId="1076"/>
+      <pc:docMkLst>
+        <pc:docMk/>
+      </pc:docMkLst>
+      <pc:sldChg chg="modSp mod">
+        <pc:chgData name="Prateek Gupta" userId="e2c2300c30275623" providerId="LiveId" clId="{86F74277-42E8-4C62-8B8A-50731E646123}" dt="2026-05-21T05:20:57.425" v="161" actId="20577"/>
+        <pc:sldMkLst>
+          <pc:docMk/>
+          <pc:sldMk cId="0" sldId="256"/>
+        </pc:sldMkLst>
+        <pc:spChg chg="mod">
+          <ac:chgData name="Prateek Gupta" userId="e2c2300c30275623" providerId="LiveId" clId="{86F74277-42E8-4C62-8B8A-50731E646123}" dt="2026-05-21T05:13:19.118" v="146" actId="1076"/>
+          <ac:spMkLst>
+            <pc:docMk/>
+            <pc:sldMk cId="0" sldId="256"/>
+            <ac:spMk id="3" creationId="{00000000-0000-0000-0000-000000000000}"/>
+          </ac:spMkLst>
+        </pc:spChg>
+        <pc:spChg chg="mod">
+          <ac:chgData name="Prateek Gupta" userId="e2c2300c30275623" providerId="LiveId" clId="{86F74277-42E8-4C62-8B8A-50731E646123}" dt="2026-05-21T05:12:48.816" v="142" actId="20577"/>
+          <ac:spMkLst>
+            <pc:docMk/>
+            <pc:sldMk cId="0" sldId="256"/>
+            <ac:spMk id="4" creationId="{00000000-0000-0000-0000-000000000000}"/>
+          </ac:spMkLst>
+        </pc:spChg>
+        <pc:spChg chg="mod">
+          <ac:chgData name="Prateek Gupta" userId="e2c2300c30275623" providerId="LiveId" clId="{86F74277-42E8-4C62-8B8A-50731E646123}" dt="2026-05-21T05:20:57.425" v="161" actId="20577"/>
+          <ac:spMkLst>
+            <pc:docMk/>
+            <pc:sldMk cId="0" sldId="256"/>
+            <ac:spMk id="5" creationId="{00000000-0000-0000-0000-000000000000}"/>
+          </ac:spMkLst>
+        </pc:spChg>
+      </pc:sldChg>
+      <pc:sldChg chg="modSp mod">
+        <pc:chgData name="Prateek Gupta" userId="e2c2300c30275623" providerId="LiveId" clId="{86F74277-42E8-4C62-8B8A-50731E646123}" dt="2026-05-21T04:10:47.022" v="9" actId="20577"/>
+        <pc:sldMkLst>
+          <pc:docMk/>
+          <pc:sldMk cId="0" sldId="257"/>
+        </pc:sldMkLst>
+        <pc:spChg chg="mod">
+          <ac:chgData name="Prateek Gupta" userId="e2c2300c30275623" providerId="LiveId" clId="{86F74277-42E8-4C62-8B8A-50731E646123}" dt="2026-05-21T04:10:47.022" v="9" actId="20577"/>
+          <ac:spMkLst>
+            <pc:docMk/>
+            <pc:sldMk cId="0" sldId="257"/>
+            <ac:spMk id="12" creationId="{00000000-0000-0000-0000-000000000000}"/>
+          </ac:spMkLst>
+        </pc:spChg>
+      </pc:sldChg>
+      <pc:sldChg chg="modSp mod">
+        <pc:chgData name="Prateek Gupta" userId="e2c2300c30275623" providerId="LiveId" clId="{86F74277-42E8-4C62-8B8A-50731E646123}" dt="2026-05-21T04:12:20.540" v="33" actId="20577"/>
+        <pc:sldMkLst>
+          <pc:docMk/>
+          <pc:sldMk cId="0" sldId="258"/>
+        </pc:sldMkLst>
+        <pc:spChg chg="mod">
+          <ac:chgData name="Prateek Gupta" userId="e2c2300c30275623" providerId="LiveId" clId="{86F74277-42E8-4C62-8B8A-50731E646123}" dt="2026-05-21T04:12:20.540" v="33" actId="20577"/>
+          <ac:spMkLst>
+            <pc:docMk/>
+            <pc:sldMk cId="0" sldId="258"/>
+            <ac:spMk id="6" creationId="{00000000-0000-0000-0000-000000000000}"/>
+          </ac:spMkLst>
+        </pc:spChg>
+      </pc:sldChg>
+      <pc:sldChg chg="ord">
+        <pc:chgData name="Prateek Gupta" userId="e2c2300c30275623" providerId="LiveId" clId="{86F74277-42E8-4C62-8B8A-50731E646123}" dt="2026-05-21T05:08:33.236" v="109"/>
+        <pc:sldMkLst>
+          <pc:docMk/>
+          <pc:sldMk cId="0" sldId="259"/>
+        </pc:sldMkLst>
+      </pc:sldChg>
+      <pc:sldChg chg="del">
+        <pc:chgData name="Prateek Gupta" userId="e2c2300c30275623" providerId="LiveId" clId="{86F74277-42E8-4C62-8B8A-50731E646123}" dt="2026-05-21T04:50:33.897" v="84" actId="2696"/>
+        <pc:sldMkLst>
+          <pc:docMk/>
+          <pc:sldMk cId="0" sldId="260"/>
+        </pc:sldMkLst>
+      </pc:sldChg>
+      <pc:sldChg chg="modSp add del mod setBg">
+        <pc:chgData name="Prateek Gupta" userId="e2c2300c30275623" providerId="LiveId" clId="{86F74277-42E8-4C62-8B8A-50731E646123}" dt="2026-05-21T05:04:28.515" v="103" actId="2696"/>
+        <pc:sldMkLst>
+          <pc:docMk/>
+          <pc:sldMk cId="23500289" sldId="260"/>
+        </pc:sldMkLst>
+        <pc:spChg chg="mod">
+          <ac:chgData name="Prateek Gupta" userId="e2c2300c30275623" providerId="LiveId" clId="{86F74277-42E8-4C62-8B8A-50731E646123}" dt="2026-05-21T04:51:12.918" v="94" actId="20577"/>
+          <ac:spMkLst>
+            <pc:docMk/>
+            <pc:sldMk cId="23500289" sldId="260"/>
+            <ac:spMk id="2" creationId="{00000000-0000-0000-0000-000000000000}"/>
+          </ac:spMkLst>
+        </pc:spChg>
+      </pc:sldChg>
+      <pc:sldChg chg="modSp del mod">
+        <pc:chgData name="Prateek Gupta" userId="e2c2300c30275623" providerId="LiveId" clId="{86F74277-42E8-4C62-8B8A-50731E646123}" dt="2026-05-21T05:03:38.567" v="99" actId="2696"/>
+        <pc:sldMkLst>
+          <pc:docMk/>
+          <pc:sldMk cId="0" sldId="261"/>
+        </pc:sldMkLst>
+        <pc:spChg chg="mod">
+          <ac:chgData name="Prateek Gupta" userId="e2c2300c30275623" providerId="LiveId" clId="{86F74277-42E8-4C62-8B8A-50731E646123}" dt="2026-05-21T04:49:03.272" v="83" actId="20577"/>
+          <ac:spMkLst>
+            <pc:docMk/>
+            <pc:sldMk cId="0" sldId="261"/>
+            <ac:spMk id="2" creationId="{00000000-0000-0000-0000-000000000000}"/>
+          </ac:spMkLst>
+        </pc:spChg>
+        <pc:spChg chg="mod">
+          <ac:chgData name="Prateek Gupta" userId="e2c2300c30275623" providerId="LiveId" clId="{86F74277-42E8-4C62-8B8A-50731E646123}" dt="2026-05-21T04:17:06.701" v="37" actId="14100"/>
+          <ac:spMkLst>
+            <pc:docMk/>
+            <pc:sldMk cId="0" sldId="261"/>
+            <ac:spMk id="21" creationId="{00000000-0000-0000-0000-000000000000}"/>
+          </ac:spMkLst>
+        </pc:spChg>
+      </pc:sldChg>
+      <pc:sldChg chg="delSp modSp mod ord">
+        <pc:chgData name="Prateek Gupta" userId="e2c2300c30275623" providerId="LiveId" clId="{86F74277-42E8-4C62-8B8A-50731E646123}" dt="2026-05-21T06:15:49.807" v="166" actId="1076"/>
+        <pc:sldMkLst>
+          <pc:docMk/>
+          <pc:sldMk cId="0" sldId="262"/>
+        </pc:sldMkLst>
+        <pc:spChg chg="mod">
+          <ac:chgData name="Prateek Gupta" userId="e2c2300c30275623" providerId="LiveId" clId="{86F74277-42E8-4C62-8B8A-50731E646123}" dt="2026-05-21T06:15:43.456" v="165" actId="20577"/>
+          <ac:spMkLst>
+            <pc:docMk/>
+            <pc:sldMk cId="0" sldId="262"/>
+            <ac:spMk id="2" creationId="{00000000-0000-0000-0000-000000000000}"/>
+          </ac:spMkLst>
+        </pc:spChg>
+        <pc:spChg chg="del mod">
+          <ac:chgData name="Prateek Gupta" userId="e2c2300c30275623" providerId="LiveId" clId="{86F74277-42E8-4C62-8B8A-50731E646123}" dt="2026-05-21T06:15:27.281" v="163" actId="21"/>
+          <ac:spMkLst>
+            <pc:docMk/>
+            <pc:sldMk cId="0" sldId="262"/>
+            <ac:spMk id="4" creationId="{00000000-0000-0000-0000-000000000000}"/>
+          </ac:spMkLst>
+        </pc:spChg>
+        <pc:spChg chg="mod">
+          <ac:chgData name="Prateek Gupta" userId="e2c2300c30275623" providerId="LiveId" clId="{86F74277-42E8-4C62-8B8A-50731E646123}" dt="2026-05-21T06:15:49.807" v="166" actId="1076"/>
+          <ac:spMkLst>
+            <pc:docMk/>
+            <pc:sldMk cId="0" sldId="262"/>
+            <ac:spMk id="5" creationId="{00000000-0000-0000-0000-000000000000}"/>
+          </ac:spMkLst>
+        </pc:spChg>
+        <pc:spChg chg="mod">
+          <ac:chgData name="Prateek Gupta" userId="e2c2300c30275623" providerId="LiveId" clId="{86F74277-42E8-4C62-8B8A-50731E646123}" dt="2026-05-21T04:20:13.470" v="38" actId="14100"/>
+          <ac:spMkLst>
+            <pc:docMk/>
+            <pc:sldMk cId="0" sldId="262"/>
+            <ac:spMk id="6" creationId="{00000000-0000-0000-0000-000000000000}"/>
+          </ac:spMkLst>
+        </pc:spChg>
+        <pc:spChg chg="mod">
+          <ac:chgData name="Prateek Gupta" userId="e2c2300c30275623" providerId="LiveId" clId="{86F74277-42E8-4C62-8B8A-50731E646123}" dt="2026-05-21T04:21:31.121" v="56" actId="20577"/>
+          <ac:spMkLst>
+            <pc:docMk/>
+            <pc:sldMk cId="0" sldId="262"/>
+            <ac:spMk id="11" creationId="{00000000-0000-0000-0000-000000000000}"/>
+          </ac:spMkLst>
+        </pc:spChg>
+        <pc:spChg chg="mod">
+          <ac:chgData name="Prateek Gupta" userId="e2c2300c30275623" providerId="LiveId" clId="{86F74277-42E8-4C62-8B8A-50731E646123}" dt="2026-05-21T04:20:56.399" v="40"/>
+          <ac:spMkLst>
+            <pc:docMk/>
+            <pc:sldMk cId="0" sldId="262"/>
+            <ac:spMk id="17" creationId="{00000000-0000-0000-0000-000000000000}"/>
+          </ac:spMkLst>
+        </pc:spChg>
+      </pc:sldChg>
+      <pc:sldChg chg="modSp mod">
+        <pc:chgData name="Prateek Gupta" userId="e2c2300c30275623" providerId="LiveId" clId="{86F74277-42E8-4C62-8B8A-50731E646123}" dt="2026-05-21T04:52:54.913" v="97" actId="1076"/>
+        <pc:sldMkLst>
+          <pc:docMk/>
+          <pc:sldMk cId="2666001561" sldId="263"/>
+        </pc:sldMkLst>
+        <pc:spChg chg="mod">
+          <ac:chgData name="Prateek Gupta" userId="e2c2300c30275623" providerId="LiveId" clId="{86F74277-42E8-4C62-8B8A-50731E646123}" dt="2026-05-21T04:52:54.913" v="97" actId="1076"/>
+          <ac:spMkLst>
+            <pc:docMk/>
+            <pc:sldMk cId="2666001561" sldId="263"/>
+            <ac:spMk id="4" creationId="{2FB3C369-C45F-B4D5-ECA1-A10055D5C509}"/>
+          </ac:spMkLst>
+        </pc:spChg>
+      </pc:sldChg>
+      <pc:sldChg chg="add modTransition setBg">
+        <pc:chgData name="Prateek Gupta" userId="e2c2300c30275623" providerId="LiveId" clId="{86F74277-42E8-4C62-8B8A-50731E646123}" dt="2026-05-21T05:05:42.782" v="104"/>
+        <pc:sldMkLst>
+          <pc:docMk/>
+          <pc:sldMk cId="0" sldId="264"/>
+        </pc:sldMkLst>
+      </pc:sldChg>
+      <pc:sldChg chg="addSp delSp add mod ord modTransition setBg">
+        <pc:chgData name="Prateek Gupta" userId="e2c2300c30275623" providerId="LiveId" clId="{86F74277-42E8-4C62-8B8A-50731E646123}" dt="2026-05-21T05:14:35.769" v="150" actId="11529"/>
+        <pc:sldMkLst>
+          <pc:docMk/>
+          <pc:sldMk cId="0" sldId="265"/>
+        </pc:sldMkLst>
+        <pc:spChg chg="add del">
+          <ac:chgData name="Prateek Gupta" userId="e2c2300c30275623" providerId="LiveId" clId="{86F74277-42E8-4C62-8B8A-50731E646123}" dt="2026-05-21T05:14:35.769" v="150" actId="11529"/>
+          <ac:spMkLst>
+            <pc:docMk/>
+            <pc:sldMk cId="0" sldId="265"/>
+            <ac:spMk id="13" creationId="{5424B971-DD44-EEEC-420E-6EEC93B15DD7}"/>
+          </ac:spMkLst>
+        </pc:spChg>
+      </pc:sldChg>
+    </pc:docChg>
+  </pc:docChgLst>
+</pc:chgInfo>
 </file>
 
 <file path=ppt/notesMasters/notesMaster1.xml><?xml version="1.0" encoding="utf-8"?>
@@ -1218,7 +1445,7 @@
         </p:nvSpPr>
         <p:spPr>
           <a:xfrm>
-            <a:off x="128016" y="1325880"/>
+            <a:off x="299852" y="704088"/>
             <a:ext cx="6035040" cy="1783080"/>
           </a:xfrm>
           <a:prstGeom prst="rect">
@@ -1259,17 +1486,6 @@
             <a:pPr marL="0" indent="0">
               <a:buNone/>
             </a:pPr>
-            <a:r>
-              <a:rPr lang="en-US" sz="1300" dirty="0">
-                <a:solidFill>
-                  <a:srgbClr val="6B7280"/>
-                </a:solidFill>
-                <a:latin typeface="Calibri" pitchFamily="34" charset="0"/>
-                <a:ea typeface="Calibri" pitchFamily="34" charset="-122"/>
-                <a:cs typeface="Calibri" pitchFamily="34" charset="-120"/>
-              </a:rPr>
-              <a:t>SQL — Data Query Language</a:t>
-            </a:r>
             <a:endParaRPr lang="en-US" sz="1300" dirty="0"/>
           </a:p>
         </p:txBody>
@@ -1282,7 +1498,7 @@
         </p:nvSpPr>
         <p:spPr>
           <a:xfrm>
-            <a:off x="411480" y="1389888"/>
+            <a:off x="437012" y="804672"/>
             <a:ext cx="5760720" cy="1572768"/>
           </a:xfrm>
           <a:prstGeom prst="rect">
@@ -1302,7 +1518,7 @@
               <a:buNone/>
             </a:pPr>
             <a:r>
-              <a:rPr lang="en-US" sz="3800" b="1" dirty="0">
+              <a:rPr lang="en-US" sz="3000" b="1" dirty="0">
                 <a:solidFill>
                   <a:srgbClr val="111827"/>
                 </a:solidFill>
@@ -1310,9 +1526,8 @@
                 <a:ea typeface="Calibri" pitchFamily="34" charset="-122"/>
                 <a:cs typeface="Calibri" pitchFamily="34" charset="-120"/>
               </a:rPr>
-              <a:t>DQL &amp; the</a:t>
-            </a:r>
-            <a:endParaRPr lang="en-US" sz="3800" dirty="0"/>
+              <a:t>DQL SELECT Command </a:t>
+            </a:r>
           </a:p>
           <a:p>
             <a:pPr marL="0" indent="0">
@@ -1322,7 +1537,7 @@
               <a:buNone/>
             </a:pPr>
             <a:r>
-              <a:rPr lang="en-US" sz="3800" b="1" dirty="0">
+              <a:rPr lang="en-US" sz="3000" b="1" dirty="0">
                 <a:solidFill>
                   <a:srgbClr val="111827"/>
                 </a:solidFill>
@@ -1330,9 +1545,28 @@
                 <a:ea typeface="Calibri" pitchFamily="34" charset="-122"/>
                 <a:cs typeface="Calibri" pitchFamily="34" charset="-120"/>
               </a:rPr>
-              <a:t>SELECT Command</a:t>
-            </a:r>
-            <a:endParaRPr lang="en-US" sz="3800" dirty="0"/>
+              <a:t>&amp; </a:t>
+            </a:r>
+          </a:p>
+          <a:p>
+            <a:pPr marL="0" indent="0">
+              <a:lnSpc>
+                <a:spcPct val="115000"/>
+              </a:lnSpc>
+              <a:buNone/>
+            </a:pPr>
+            <a:r>
+              <a:rPr lang="en-US" sz="3000" b="1" dirty="0">
+                <a:solidFill>
+                  <a:srgbClr val="111827"/>
+                </a:solidFill>
+                <a:latin typeface="Calibri" pitchFamily="34" charset="0"/>
+                <a:ea typeface="Calibri" pitchFamily="34" charset="-122"/>
+                <a:cs typeface="Calibri" pitchFamily="34" charset="-120"/>
+              </a:rPr>
+              <a:t>Real Time Use cases</a:t>
+            </a:r>
+            <a:endParaRPr lang="en-US" sz="3000" dirty="0"/>
           </a:p>
         </p:txBody>
       </p:sp>
@@ -1837,8 +2071,8 @@
         </p:nvSpPr>
         <p:spPr>
           <a:xfrm>
-            <a:off x="5257800" y="1572768"/>
-            <a:ext cx="3291840" cy="2514600"/>
+            <a:off x="5257800" y="1554479"/>
+            <a:ext cx="3291840" cy="2532889"/>
           </a:xfrm>
           <a:prstGeom prst="rect">
             <a:avLst/>
@@ -1856,18 +2090,14 @@
               </a:lnSpc>
               <a:buNone/>
             </a:pPr>
-            <a:r>
-              <a:rPr lang="en-US" sz="1300" dirty="0">
-                <a:solidFill>
-                  <a:srgbClr val="374151"/>
-                </a:solidFill>
-                <a:latin typeface="Calibri" pitchFamily="34" charset="0"/>
-                <a:ea typeface="Calibri" pitchFamily="34" charset="-122"/>
-                <a:cs typeface="Calibri" pitchFamily="34" charset="-120"/>
-              </a:rPr>
-              <a:t>A database is like a huge Excel sheet with millions of rows.</a:t>
-            </a:r>
-            <a:endParaRPr lang="en-US" sz="1300" dirty="0"/>
+            <a:endParaRPr lang="en-US" sz="1300" dirty="0">
+              <a:solidFill>
+                <a:srgbClr val="374151"/>
+              </a:solidFill>
+              <a:latin typeface="Calibri" pitchFamily="34" charset="0"/>
+              <a:ea typeface="Calibri" pitchFamily="34" charset="-122"/>
+              <a:cs typeface="Calibri" pitchFamily="34" charset="-120"/>
+            </a:endParaRPr>
           </a:p>
           <a:p>
             <a:pPr marL="0" indent="0">
@@ -1876,7 +2106,17 @@
               </a:lnSpc>
               <a:buNone/>
             </a:pPr>
-            <a:endParaRPr lang="en-US" sz="1300" dirty="0"/>
+            <a:r>
+              <a:rPr lang="en-US" sz="1300" dirty="0">
+                <a:solidFill>
+                  <a:srgbClr val="374151"/>
+                </a:solidFill>
+                <a:latin typeface="Calibri" pitchFamily="34" charset="0"/>
+                <a:ea typeface="Calibri" pitchFamily="34" charset="-122"/>
+                <a:cs typeface="Calibri" pitchFamily="34" charset="-120"/>
+              </a:rPr>
+              <a:t>A database is like a huge Excel sheet with millions of rows.</a:t>
+            </a:r>
           </a:p>
           <a:p>
             <a:pPr marL="0" indent="0">
@@ -1905,7 +2145,17 @@
               </a:lnSpc>
               <a:buNone/>
             </a:pPr>
-            <a:endParaRPr lang="en-US" sz="1300" dirty="0"/>
+            <a:r>
+              <a:rPr lang="en-US" sz="1300" dirty="0">
+                <a:solidFill>
+                  <a:srgbClr val="374151"/>
+                </a:solidFill>
+                <a:latin typeface="Calibri" pitchFamily="34" charset="0"/>
+                <a:ea typeface="Calibri" pitchFamily="34" charset="-122"/>
+                <a:cs typeface="Calibri" pitchFamily="34" charset="-120"/>
+              </a:rPr>
+              <a:t>Example:</a:t>
+            </a:r>
           </a:p>
           <a:p>
             <a:pPr marL="0" indent="0">
@@ -1923,9 +2173,8 @@
                 <a:ea typeface="Calibri" pitchFamily="34" charset="-122"/>
                 <a:cs typeface="Calibri" pitchFamily="34" charset="-120"/>
               </a:rPr>
-              <a:t>Example:</a:t>
-            </a:r>
-            <a:endParaRPr lang="en-US" sz="1300" dirty="0"/>
+              <a:t>"Show me all orders above ₹500 placed today from Mumbai.“</a:t>
+            </a:r>
           </a:p>
           <a:p>
             <a:pPr marL="0" indent="0">
@@ -1934,17 +2183,6 @@
               </a:lnSpc>
               <a:buNone/>
             </a:pPr>
-            <a:r>
-              <a:rPr lang="en-US" sz="1300" dirty="0">
-                <a:solidFill>
-                  <a:srgbClr val="374151"/>
-                </a:solidFill>
-                <a:latin typeface="Calibri" pitchFamily="34" charset="0"/>
-                <a:ea typeface="Calibri" pitchFamily="34" charset="-122"/>
-                <a:cs typeface="Calibri" pitchFamily="34" charset="-120"/>
-              </a:rPr>
-              <a:t>"Show me all orders above ₹500 placed today from Mumbai."</a:t>
-            </a:r>
             <a:endParaRPr lang="en-US" sz="1300" dirty="0"/>
           </a:p>
         </p:txBody>
@@ -2207,7 +2445,7 @@
                 <a:ea typeface="Courier New" pitchFamily="34" charset="-122"/>
                 <a:cs typeface="Courier New" pitchFamily="34" charset="-120"/>
               </a:rPr>
-              <a:t>-- optional
+              <a:t>-- filtering
 </a:t>
             </a:r>
             <a:r>
@@ -2241,7 +2479,7 @@
                 <a:ea typeface="Courier New" pitchFamily="34" charset="-122"/>
                 <a:cs typeface="Courier New" pitchFamily="34" charset="-120"/>
               </a:rPr>
-              <a:t>-- optional</a:t>
+              <a:t>-- sorting</a:t>
             </a:r>
             <a:endParaRPr lang="en-US" sz="1350" dirty="0"/>
           </a:p>
@@ -2630,6 +2868,671 @@
 </file>
 
 <file path=ppt/slides/slide4.xml><?xml version="1.0" encoding="utf-8"?>
+<p:sld xmlns:a="http://schemas.openxmlformats.org/drawingml/2006/main" xmlns:r="http://schemas.openxmlformats.org/officeDocument/2006/relationships" xmlns:p="http://schemas.openxmlformats.org/presentationml/2006/main">
+  <p:cSld name="Slide 7">
+    <p:bg>
+      <p:bgPr>
+        <a:solidFill>
+          <a:srgbClr val="FFFFFF"/>
+        </a:solidFill>
+        <a:effectLst/>
+      </p:bgPr>
+    </p:bg>
+    <p:spTree>
+      <p:nvGrpSpPr>
+        <p:cNvPr id="1" name=""/>
+        <p:cNvGrpSpPr/>
+        <p:nvPr/>
+      </p:nvGrpSpPr>
+      <p:grpSpPr>
+        <a:xfrm>
+          <a:off x="0" y="0"/>
+          <a:ext cx="0" cy="0"/>
+          <a:chOff x="0" y="0"/>
+          <a:chExt cx="0" cy="0"/>
+        </a:xfrm>
+      </p:grpSpPr>
+      <p:sp>
+        <p:nvSpPr>
+          <p:cNvPr id="2" name="Text 0"/>
+          <p:cNvSpPr/>
+          <p:nvPr/>
+        </p:nvSpPr>
+        <p:spPr>
+          <a:xfrm>
+            <a:off x="502920" y="256032"/>
+            <a:ext cx="8138160" cy="502920"/>
+          </a:xfrm>
+          <a:prstGeom prst="rect">
+            <a:avLst/>
+          </a:prstGeom>
+          <a:noFill/>
+          <a:ln/>
+        </p:spPr>
+        <p:txBody>
+          <a:bodyPr wrap="square" lIns="0" tIns="0" rIns="0" bIns="0" rtlCol="0" anchor="ctr"/>
+          <a:lstStyle/>
+          <a:p>
+            <a:pPr marL="0" indent="0">
+              <a:buNone/>
+            </a:pPr>
+            <a:r>
+              <a:rPr lang="en-US" sz="2700" b="1" dirty="0">
+                <a:solidFill>
+                  <a:srgbClr val="111827"/>
+                </a:solidFill>
+                <a:latin typeface="Calibri" pitchFamily="34" charset="0"/>
+                <a:ea typeface="Calibri" pitchFamily="34" charset="-122"/>
+                <a:cs typeface="Calibri" pitchFamily="34" charset="-120"/>
+              </a:rPr>
+              <a:t>SELECT with JOIN</a:t>
+            </a:r>
+            <a:endParaRPr lang="en-US" sz="2700" dirty="0"/>
+          </a:p>
+        </p:txBody>
+      </p:sp>
+      <p:sp>
+        <p:nvSpPr>
+          <p:cNvPr id="3" name="Shape 1"/>
+          <p:cNvSpPr/>
+          <p:nvPr/>
+        </p:nvSpPr>
+        <p:spPr>
+          <a:xfrm>
+            <a:off x="502920" y="804672"/>
+            <a:ext cx="8138160" cy="0"/>
+          </a:xfrm>
+          <a:prstGeom prst="line">
+            <a:avLst/>
+          </a:prstGeom>
+          <a:noFill/>
+          <a:ln w="22860">
+            <a:solidFill>
+              <a:srgbClr val="1D4ED8"/>
+            </a:solidFill>
+            <a:prstDash val="solid"/>
+          </a:ln>
+        </p:spPr>
+      </p:sp>
+      <p:sp>
+        <p:nvSpPr>
+          <p:cNvPr id="5" name="Text 3"/>
+          <p:cNvSpPr/>
+          <p:nvPr/>
+        </p:nvSpPr>
+        <p:spPr>
+          <a:xfrm>
+            <a:off x="502920" y="1051560"/>
+            <a:ext cx="8138160" cy="292608"/>
+          </a:xfrm>
+          <a:prstGeom prst="rect">
+            <a:avLst/>
+          </a:prstGeom>
+          <a:noFill/>
+          <a:ln/>
+        </p:spPr>
+        <p:txBody>
+          <a:bodyPr wrap="square" lIns="0" tIns="0" rIns="0" bIns="0" rtlCol="0" anchor="ctr"/>
+          <a:lstStyle/>
+          <a:p>
+            <a:pPr marL="0" indent="0">
+              <a:buNone/>
+            </a:pPr>
+            <a:r>
+              <a:rPr lang="en-US" sz="1250" i="1" dirty="0">
+                <a:solidFill>
+                  <a:srgbClr val="6B7280"/>
+                </a:solidFill>
+                <a:latin typeface="Calibri" pitchFamily="34" charset="0"/>
+                <a:ea typeface="Calibri" pitchFamily="34" charset="-122"/>
+                <a:cs typeface="Calibri" pitchFamily="34" charset="-120"/>
+              </a:rPr>
+              <a:t>Real query — get customer name and their order details:</a:t>
+            </a:r>
+            <a:endParaRPr lang="en-US" sz="1250" dirty="0"/>
+          </a:p>
+        </p:txBody>
+      </p:sp>
+      <p:sp>
+        <p:nvSpPr>
+          <p:cNvPr id="6" name="Shape 4"/>
+          <p:cNvSpPr/>
+          <p:nvPr/>
+        </p:nvSpPr>
+        <p:spPr>
+          <a:xfrm>
+            <a:off x="502920" y="1783080"/>
+            <a:ext cx="8138160" cy="1481328"/>
+          </a:xfrm>
+          <a:prstGeom prst="rect">
+            <a:avLst/>
+          </a:prstGeom>
+          <a:solidFill>
+            <a:srgbClr val="F8F9FA"/>
+          </a:solidFill>
+          <a:ln w="12700">
+            <a:solidFill>
+              <a:srgbClr val="E5E7EB"/>
+            </a:solidFill>
+            <a:prstDash val="solid"/>
+          </a:ln>
+        </p:spPr>
+      </p:sp>
+      <p:sp>
+        <p:nvSpPr>
+          <p:cNvPr id="7" name="Shape 5"/>
+          <p:cNvSpPr/>
+          <p:nvPr/>
+        </p:nvSpPr>
+        <p:spPr>
+          <a:xfrm>
+            <a:off x="502920" y="1783080"/>
+            <a:ext cx="64008" cy="1481328"/>
+          </a:xfrm>
+          <a:prstGeom prst="rect">
+            <a:avLst/>
+          </a:prstGeom>
+          <a:solidFill>
+            <a:srgbClr val="1D4ED8"/>
+          </a:solidFill>
+          <a:ln w="12700">
+            <a:solidFill>
+              <a:srgbClr val="1D4ED8"/>
+            </a:solidFill>
+            <a:prstDash val="solid"/>
+          </a:ln>
+        </p:spPr>
+      </p:sp>
+      <p:sp>
+        <p:nvSpPr>
+          <p:cNvPr id="8" name="Text 6"/>
+          <p:cNvSpPr/>
+          <p:nvPr/>
+        </p:nvSpPr>
+        <p:spPr>
+          <a:xfrm>
+            <a:off x="685800" y="1837944"/>
+            <a:ext cx="7863840" cy="1371600"/>
+          </a:xfrm>
+          <a:prstGeom prst="rect">
+            <a:avLst/>
+          </a:prstGeom>
+          <a:noFill/>
+          <a:ln/>
+        </p:spPr>
+        <p:txBody>
+          <a:bodyPr wrap="square" lIns="0" tIns="0" rIns="0" bIns="0" rtlCol="0" anchor="t"/>
+          <a:lstStyle/>
+          <a:p>
+            <a:pPr marL="0" indent="0">
+              <a:buNone/>
+            </a:pPr>
+            <a:r>
+              <a:rPr lang="en-US" sz="1350" b="1" dirty="0">
+                <a:solidFill>
+                  <a:srgbClr val="1D4ED8"/>
+                </a:solidFill>
+                <a:latin typeface="Courier New" pitchFamily="34" charset="0"/>
+                <a:ea typeface="Courier New" pitchFamily="34" charset="-122"/>
+                <a:cs typeface="Courier New" pitchFamily="34" charset="-120"/>
+              </a:rPr>
+              <a:t>SELECT  </a:t>
+            </a:r>
+            <a:r>
+              <a:rPr lang="en-US" sz="1350" dirty="0">
+                <a:solidFill>
+                  <a:srgbClr val="111827"/>
+                </a:solidFill>
+                <a:latin typeface="Courier New" pitchFamily="34" charset="0"/>
+                <a:ea typeface="Courier New" pitchFamily="34" charset="-122"/>
+                <a:cs typeface="Courier New" pitchFamily="34" charset="-120"/>
+              </a:rPr>
+              <a:t>c.name, c.city, o.order_id, o.amount, o.status
+</a:t>
+            </a:r>
+            <a:r>
+              <a:rPr lang="en-US" sz="1350" b="1" dirty="0">
+                <a:solidFill>
+                  <a:srgbClr val="1D4ED8"/>
+                </a:solidFill>
+                <a:latin typeface="Courier New" pitchFamily="34" charset="0"/>
+                <a:ea typeface="Courier New" pitchFamily="34" charset="-122"/>
+                <a:cs typeface="Courier New" pitchFamily="34" charset="-120"/>
+              </a:rPr>
+              <a:t>FROM    </a:t>
+            </a:r>
+            <a:r>
+              <a:rPr lang="en-US" sz="1350" dirty="0">
+                <a:solidFill>
+                  <a:srgbClr val="111827"/>
+                </a:solidFill>
+                <a:latin typeface="Courier New" pitchFamily="34" charset="0"/>
+                <a:ea typeface="Courier New" pitchFamily="34" charset="-122"/>
+                <a:cs typeface="Courier New" pitchFamily="34" charset="-120"/>
+              </a:rPr>
+              <a:t>customers c
+</a:t>
+            </a:r>
+            <a:r>
+              <a:rPr lang="en-US" sz="1350" b="1" dirty="0">
+                <a:solidFill>
+                  <a:srgbClr val="1D4ED8"/>
+                </a:solidFill>
+                <a:latin typeface="Courier New" pitchFamily="34" charset="0"/>
+                <a:ea typeface="Courier New" pitchFamily="34" charset="-122"/>
+                <a:cs typeface="Courier New" pitchFamily="34" charset="-120"/>
+              </a:rPr>
+              <a:t>JOIN    </a:t>
+            </a:r>
+            <a:r>
+              <a:rPr lang="en-US" sz="1350" dirty="0">
+                <a:solidFill>
+                  <a:srgbClr val="111827"/>
+                </a:solidFill>
+                <a:latin typeface="Courier New" pitchFamily="34" charset="0"/>
+                <a:ea typeface="Courier New" pitchFamily="34" charset="-122"/>
+                <a:cs typeface="Courier New" pitchFamily="34" charset="-120"/>
+              </a:rPr>
+              <a:t>orders o  ON  c.customer_id = o.customer_id
+</a:t>
+            </a:r>
+            <a:r>
+              <a:rPr lang="en-US" sz="1350" b="1" dirty="0">
+                <a:solidFill>
+                  <a:srgbClr val="7C3AED"/>
+                </a:solidFill>
+                <a:latin typeface="Courier New" pitchFamily="34" charset="0"/>
+                <a:ea typeface="Courier New" pitchFamily="34" charset="-122"/>
+                <a:cs typeface="Courier New" pitchFamily="34" charset="-120"/>
+              </a:rPr>
+              <a:t>WHERE   </a:t>
+            </a:r>
+            <a:r>
+              <a:rPr lang="en-US" sz="1350" dirty="0">
+                <a:solidFill>
+                  <a:srgbClr val="111827"/>
+                </a:solidFill>
+                <a:latin typeface="Courier New" pitchFamily="34" charset="0"/>
+                <a:ea typeface="Courier New" pitchFamily="34" charset="-122"/>
+                <a:cs typeface="Courier New" pitchFamily="34" charset="-120"/>
+              </a:rPr>
+              <a:t>o.status = </a:t>
+            </a:r>
+            <a:r>
+              <a:rPr lang="en-US" sz="1350" dirty="0">
+                <a:solidFill>
+                  <a:srgbClr val="DC2626"/>
+                </a:solidFill>
+                <a:latin typeface="Courier New" pitchFamily="34" charset="0"/>
+                <a:ea typeface="Courier New" pitchFamily="34" charset="-122"/>
+                <a:cs typeface="Courier New" pitchFamily="34" charset="-120"/>
+              </a:rPr>
+              <a:t>'Delivered'</a:t>
+            </a:r>
+            <a:r>
+              <a:rPr lang="en-US" sz="1350" dirty="0">
+                <a:solidFill>
+                  <a:srgbClr val="111827"/>
+                </a:solidFill>
+                <a:latin typeface="Courier New" pitchFamily="34" charset="0"/>
+                <a:ea typeface="Courier New" pitchFamily="34" charset="-122"/>
+                <a:cs typeface="Courier New" pitchFamily="34" charset="-120"/>
+              </a:rPr>
+              <a:t>  AND  c.city = </a:t>
+            </a:r>
+            <a:r>
+              <a:rPr lang="en-US" sz="1350" dirty="0">
+                <a:solidFill>
+                  <a:srgbClr val="DC2626"/>
+                </a:solidFill>
+                <a:latin typeface="Courier New" pitchFamily="34" charset="0"/>
+                <a:ea typeface="Courier New" pitchFamily="34" charset="-122"/>
+                <a:cs typeface="Courier New" pitchFamily="34" charset="-120"/>
+              </a:rPr>
+              <a:t>'Mumbai'</a:t>
+            </a:r>
+            <a:r>
+              <a:rPr lang="en-US" sz="1350" dirty="0">
+                <a:solidFill>
+                  <a:srgbClr val="111827"/>
+                </a:solidFill>
+                <a:latin typeface="Courier New" pitchFamily="34" charset="0"/>
+                <a:ea typeface="Courier New" pitchFamily="34" charset="-122"/>
+                <a:cs typeface="Courier New" pitchFamily="34" charset="-120"/>
+              </a:rPr>
+              <a:t>;</a:t>
+            </a:r>
+            <a:endParaRPr lang="en-US" sz="1350" dirty="0"/>
+          </a:p>
+        </p:txBody>
+      </p:sp>
+      <p:sp>
+        <p:nvSpPr>
+          <p:cNvPr id="9" name="Shape 7"/>
+          <p:cNvSpPr/>
+          <p:nvPr/>
+        </p:nvSpPr>
+        <p:spPr>
+          <a:xfrm>
+            <a:off x="502920" y="3401568"/>
+            <a:ext cx="54864" cy="438912"/>
+          </a:xfrm>
+          <a:prstGeom prst="rect">
+            <a:avLst/>
+          </a:prstGeom>
+          <a:solidFill>
+            <a:srgbClr val="1D4ED8"/>
+          </a:solidFill>
+          <a:ln w="12700">
+            <a:solidFill>
+              <a:srgbClr val="1D4ED8"/>
+            </a:solidFill>
+            <a:prstDash val="solid"/>
+          </a:ln>
+        </p:spPr>
+      </p:sp>
+      <p:sp>
+        <p:nvSpPr>
+          <p:cNvPr id="10" name="Text 8"/>
+          <p:cNvSpPr/>
+          <p:nvPr/>
+        </p:nvSpPr>
+        <p:spPr>
+          <a:xfrm>
+            <a:off x="685800" y="3447288"/>
+            <a:ext cx="1920240" cy="347472"/>
+          </a:xfrm>
+          <a:prstGeom prst="rect">
+            <a:avLst/>
+          </a:prstGeom>
+          <a:noFill/>
+          <a:ln/>
+        </p:spPr>
+        <p:txBody>
+          <a:bodyPr wrap="square" lIns="0" tIns="0" rIns="0" bIns="0" rtlCol="0" anchor="ctr"/>
+          <a:lstStyle/>
+          <a:p>
+            <a:pPr marL="0" indent="0">
+              <a:buNone/>
+            </a:pPr>
+            <a:r>
+              <a:rPr lang="en-US" sz="1300" b="1" dirty="0">
+                <a:solidFill>
+                  <a:srgbClr val="1D4ED8"/>
+                </a:solidFill>
+                <a:latin typeface="Courier New" pitchFamily="34" charset="0"/>
+                <a:ea typeface="Courier New" pitchFamily="34" charset="-122"/>
+                <a:cs typeface="Courier New" pitchFamily="34" charset="-120"/>
+              </a:rPr>
+              <a:t>INNER JOIN</a:t>
+            </a:r>
+            <a:endParaRPr lang="en-US" sz="1300" dirty="0"/>
+          </a:p>
+        </p:txBody>
+      </p:sp>
+      <p:sp>
+        <p:nvSpPr>
+          <p:cNvPr id="11" name="Text 9"/>
+          <p:cNvSpPr/>
+          <p:nvPr/>
+        </p:nvSpPr>
+        <p:spPr>
+          <a:xfrm>
+            <a:off x="2697480" y="3447288"/>
+            <a:ext cx="5852160" cy="347472"/>
+          </a:xfrm>
+          <a:prstGeom prst="rect">
+            <a:avLst/>
+          </a:prstGeom>
+          <a:noFill/>
+          <a:ln/>
+        </p:spPr>
+        <p:txBody>
+          <a:bodyPr wrap="square" lIns="0" tIns="0" rIns="0" bIns="0" rtlCol="0" anchor="ctr"/>
+          <a:lstStyle/>
+          <a:p>
+            <a:pPr marL="0" indent="0">
+              <a:buNone/>
+            </a:pPr>
+            <a:r>
+              <a:rPr lang="en-US" sz="1300" dirty="0">
+                <a:solidFill>
+                  <a:srgbClr val="374151"/>
+                </a:solidFill>
+                <a:latin typeface="Calibri" pitchFamily="34" charset="0"/>
+                <a:ea typeface="Calibri" pitchFamily="34" charset="-122"/>
+                <a:cs typeface="Calibri" pitchFamily="34" charset="-120"/>
+              </a:rPr>
+              <a:t>—  Only rows that match in BOTH tables (Matching Rows)</a:t>
+            </a:r>
+            <a:endParaRPr lang="en-US" sz="1300" dirty="0"/>
+          </a:p>
+        </p:txBody>
+      </p:sp>
+      <p:sp>
+        <p:nvSpPr>
+          <p:cNvPr id="12" name="Shape 10"/>
+          <p:cNvSpPr/>
+          <p:nvPr/>
+        </p:nvSpPr>
+        <p:spPr>
+          <a:xfrm>
+            <a:off x="502920" y="3950208"/>
+            <a:ext cx="54864" cy="438912"/>
+          </a:xfrm>
+          <a:prstGeom prst="rect">
+            <a:avLst/>
+          </a:prstGeom>
+          <a:solidFill>
+            <a:srgbClr val="1D4ED8"/>
+          </a:solidFill>
+          <a:ln w="12700">
+            <a:solidFill>
+              <a:srgbClr val="1D4ED8"/>
+            </a:solidFill>
+            <a:prstDash val="solid"/>
+          </a:ln>
+        </p:spPr>
+      </p:sp>
+      <p:sp>
+        <p:nvSpPr>
+          <p:cNvPr id="13" name="Text 11"/>
+          <p:cNvSpPr/>
+          <p:nvPr/>
+        </p:nvSpPr>
+        <p:spPr>
+          <a:xfrm>
+            <a:off x="685800" y="3995928"/>
+            <a:ext cx="1920240" cy="347472"/>
+          </a:xfrm>
+          <a:prstGeom prst="rect">
+            <a:avLst/>
+          </a:prstGeom>
+          <a:noFill/>
+          <a:ln/>
+        </p:spPr>
+        <p:txBody>
+          <a:bodyPr wrap="square" lIns="0" tIns="0" rIns="0" bIns="0" rtlCol="0" anchor="ctr"/>
+          <a:lstStyle/>
+          <a:p>
+            <a:pPr marL="0" indent="0">
+              <a:buNone/>
+            </a:pPr>
+            <a:r>
+              <a:rPr lang="en-US" sz="1300" b="1" dirty="0">
+                <a:solidFill>
+                  <a:srgbClr val="1D4ED8"/>
+                </a:solidFill>
+                <a:latin typeface="Courier New" pitchFamily="34" charset="0"/>
+                <a:ea typeface="Courier New" pitchFamily="34" charset="-122"/>
+                <a:cs typeface="Courier New" pitchFamily="34" charset="-120"/>
+              </a:rPr>
+              <a:t>LEFT JOIN</a:t>
+            </a:r>
+            <a:endParaRPr lang="en-US" sz="1300" dirty="0"/>
+          </a:p>
+        </p:txBody>
+      </p:sp>
+      <p:sp>
+        <p:nvSpPr>
+          <p:cNvPr id="14" name="Text 12"/>
+          <p:cNvSpPr/>
+          <p:nvPr/>
+        </p:nvSpPr>
+        <p:spPr>
+          <a:xfrm>
+            <a:off x="2697480" y="3995928"/>
+            <a:ext cx="5852160" cy="347472"/>
+          </a:xfrm>
+          <a:prstGeom prst="rect">
+            <a:avLst/>
+          </a:prstGeom>
+          <a:noFill/>
+          <a:ln/>
+        </p:spPr>
+        <p:txBody>
+          <a:bodyPr wrap="square" lIns="0" tIns="0" rIns="0" bIns="0" rtlCol="0" anchor="ctr"/>
+          <a:lstStyle/>
+          <a:p>
+            <a:pPr marL="0" indent="0">
+              <a:buNone/>
+            </a:pPr>
+            <a:r>
+              <a:rPr lang="en-US" sz="1300" dirty="0">
+                <a:solidFill>
+                  <a:srgbClr val="374151"/>
+                </a:solidFill>
+                <a:latin typeface="Calibri" pitchFamily="34" charset="0"/>
+                <a:ea typeface="Calibri" pitchFamily="34" charset="-122"/>
+                <a:cs typeface="Calibri" pitchFamily="34" charset="-120"/>
+              </a:rPr>
+              <a:t>—  All rows from the left table + matching rows from the right (nulls if no match)</a:t>
+            </a:r>
+            <a:endParaRPr lang="en-US" sz="1300" dirty="0"/>
+          </a:p>
+        </p:txBody>
+      </p:sp>
+      <p:sp>
+        <p:nvSpPr>
+          <p:cNvPr id="15" name="Shape 13"/>
+          <p:cNvSpPr/>
+          <p:nvPr/>
+        </p:nvSpPr>
+        <p:spPr>
+          <a:xfrm>
+            <a:off x="502920" y="4498848"/>
+            <a:ext cx="54864" cy="438912"/>
+          </a:xfrm>
+          <a:prstGeom prst="rect">
+            <a:avLst/>
+          </a:prstGeom>
+          <a:solidFill>
+            <a:srgbClr val="1D4ED8"/>
+          </a:solidFill>
+          <a:ln w="12700">
+            <a:solidFill>
+              <a:srgbClr val="1D4ED8"/>
+            </a:solidFill>
+            <a:prstDash val="solid"/>
+          </a:ln>
+        </p:spPr>
+      </p:sp>
+      <p:sp>
+        <p:nvSpPr>
+          <p:cNvPr id="16" name="Text 14"/>
+          <p:cNvSpPr/>
+          <p:nvPr/>
+        </p:nvSpPr>
+        <p:spPr>
+          <a:xfrm>
+            <a:off x="685800" y="4544568"/>
+            <a:ext cx="1920240" cy="347472"/>
+          </a:xfrm>
+          <a:prstGeom prst="rect">
+            <a:avLst/>
+          </a:prstGeom>
+          <a:noFill/>
+          <a:ln/>
+        </p:spPr>
+        <p:txBody>
+          <a:bodyPr wrap="square" lIns="0" tIns="0" rIns="0" bIns="0" rtlCol="0" anchor="ctr"/>
+          <a:lstStyle/>
+          <a:p>
+            <a:pPr marL="0" indent="0">
+              <a:buNone/>
+            </a:pPr>
+            <a:r>
+              <a:rPr lang="en-US" sz="1300" b="1" dirty="0">
+                <a:solidFill>
+                  <a:srgbClr val="1D4ED8"/>
+                </a:solidFill>
+                <a:latin typeface="Courier New" pitchFamily="34" charset="0"/>
+                <a:ea typeface="Courier New" pitchFamily="34" charset="-122"/>
+                <a:cs typeface="Courier New" pitchFamily="34" charset="-120"/>
+              </a:rPr>
+              <a:t>RIGHT JOIN</a:t>
+            </a:r>
+            <a:endParaRPr lang="en-US" sz="1300" dirty="0"/>
+          </a:p>
+        </p:txBody>
+      </p:sp>
+      <p:sp>
+        <p:nvSpPr>
+          <p:cNvPr id="17" name="Text 15"/>
+          <p:cNvSpPr/>
+          <p:nvPr/>
+        </p:nvSpPr>
+        <p:spPr>
+          <a:xfrm>
+            <a:off x="2697480" y="4544568"/>
+            <a:ext cx="5852160" cy="347472"/>
+          </a:xfrm>
+          <a:prstGeom prst="rect">
+            <a:avLst/>
+          </a:prstGeom>
+          <a:noFill/>
+          <a:ln/>
+        </p:spPr>
+        <p:txBody>
+          <a:bodyPr wrap="square" lIns="0" tIns="0" rIns="0" bIns="0" rtlCol="0" anchor="ctr"/>
+          <a:lstStyle/>
+          <a:p>
+            <a:r>
+              <a:rPr lang="en-US" sz="1300" dirty="0">
+                <a:solidFill>
+                  <a:srgbClr val="374151"/>
+                </a:solidFill>
+                <a:latin typeface="Calibri" pitchFamily="34" charset="0"/>
+                <a:ea typeface="Calibri" pitchFamily="34" charset="-122"/>
+                <a:cs typeface="Calibri" pitchFamily="34" charset="-120"/>
+              </a:rPr>
+              <a:t>—  All rows from the right table + matching rows from the left (nulls if no match)</a:t>
+            </a:r>
+            <a:endParaRPr lang="en-US" sz="1300" dirty="0"/>
+          </a:p>
+        </p:txBody>
+      </p:sp>
+    </p:spTree>
+  </p:cSld>
+  <p:clrMapOvr>
+    <a:masterClrMapping/>
+  </p:clrMapOvr>
+  <mc:AlternateContent xmlns:mc="http://schemas.openxmlformats.org/markup-compatibility/2006" xmlns:p14="http://schemas.microsoft.com/office/powerpoint/2010/main">
+    <mc:Choice Requires="p14">
+      <p:transition spd="slow" p14:dur="800">
+        <p:circle/>
+      </p:transition>
+    </mc:Choice>
+    <mc:Fallback xmlns="">
+      <p:transition spd="slow">
+        <p:circle/>
+      </p:transition>
+    </mc:Fallback>
+  </mc:AlternateContent>
+</p:sld>
+</file>
+
+<file path=ppt/slides/slide5.xml><?xml version="1.0" encoding="utf-8"?>
 <p:sld xmlns:a="http://schemas.openxmlformats.org/drawingml/2006/main" xmlns:r="http://schemas.openxmlformats.org/officeDocument/2006/relationships" xmlns:p="http://schemas.openxmlformats.org/presentationml/2006/main">
   <p:cSld name="Slide 4">
     <p:bg>
@@ -4830,17 +5733,9 @@
 </p:sld>
 </file>
 
-<file path=ppt/slides/slide5.xml><?xml version="1.0" encoding="utf-8"?>
+<file path=ppt/slides/slide6.xml><?xml version="1.0" encoding="utf-8"?>
 <p:sld xmlns:a="http://schemas.openxmlformats.org/drawingml/2006/main" xmlns:r="http://schemas.openxmlformats.org/officeDocument/2006/relationships" xmlns:p="http://schemas.openxmlformats.org/presentationml/2006/main">
-  <p:cSld name="Slide 5">
-    <p:bg>
-      <p:bgPr>
-        <a:solidFill>
-          <a:srgbClr val="FFFFFF"/>
-        </a:solidFill>
-        <a:effectLst/>
-      </p:bgPr>
-    </p:bg>
+  <p:cSld>
     <p:spTree>
       <p:nvGrpSpPr>
         <p:cNvPr id="1" name=""/>
@@ -4857,14 +5752,39 @@
       </p:grpSpPr>
       <p:sp>
         <p:nvSpPr>
-          <p:cNvPr id="2" name="Text 0"/>
-          <p:cNvSpPr/>
-          <p:nvPr/>
-        </p:nvSpPr>
-        <p:spPr>
-          <a:xfrm>
-            <a:off x="502920" y="256032"/>
-            <a:ext cx="8138160" cy="502920"/>
+          <p:cNvPr id="2" name="Shape 0"/>
+          <p:cNvSpPr/>
+          <p:nvPr/>
+        </p:nvSpPr>
+        <p:spPr>
+          <a:xfrm>
+            <a:off x="0" y="0"/>
+            <a:ext cx="9144000" cy="685800"/>
+          </a:xfrm>
+          <a:prstGeom prst="rect">
+            <a:avLst/>
+          </a:prstGeom>
+          <a:solidFill>
+            <a:srgbClr val="FF9900"/>
+          </a:solidFill>
+          <a:ln w="12700">
+            <a:solidFill>
+              <a:srgbClr val="FF9900"/>
+            </a:solidFill>
+            <a:prstDash val="solid"/>
+          </a:ln>
+        </p:spPr>
+      </p:sp>
+      <p:sp>
+        <p:nvSpPr>
+          <p:cNvPr id="3" name="Text 1"/>
+          <p:cNvSpPr/>
+          <p:nvPr/>
+        </p:nvSpPr>
+        <p:spPr>
+          <a:xfrm>
+            <a:off x="320040" y="91440"/>
+            <a:ext cx="8229600" cy="502920"/>
           </a:xfrm>
           <a:prstGeom prst="rect">
             <a:avLst/>
@@ -4880,38 +5800,40 @@
               <a:buNone/>
             </a:pPr>
             <a:r>
-              <a:rPr lang="en-US" sz="2700" b="1" dirty="0">
-                <a:solidFill>
-                  <a:srgbClr val="111827"/>
+              <a:rPr lang="en-US" sz="2200" b="1" dirty="0">
+                <a:solidFill>
+                  <a:srgbClr val="0D1B2A"/>
                 </a:solidFill>
                 <a:latin typeface="Calibri" pitchFamily="34" charset="0"/>
                 <a:ea typeface="Calibri" pitchFamily="34" charset="-122"/>
                 <a:cs typeface="Calibri" pitchFamily="34" charset="-120"/>
               </a:rPr>
-              <a:t>Useful Clauses with Real Queries</a:t>
-            </a:r>
-            <a:endParaRPr lang="en-US" sz="2700" dirty="0"/>
+              <a:t>🛒  Amazon — E-Commerce Queries</a:t>
+            </a:r>
+            <a:endParaRPr lang="en-US" sz="2200" dirty="0"/>
           </a:p>
         </p:txBody>
       </p:sp>
       <p:sp>
         <p:nvSpPr>
-          <p:cNvPr id="3" name="Shape 1"/>
-          <p:cNvSpPr/>
-          <p:nvPr/>
-        </p:nvSpPr>
-        <p:spPr>
-          <a:xfrm>
-            <a:off x="502920" y="804672"/>
-            <a:ext cx="8138160" cy="0"/>
-          </a:xfrm>
-          <a:prstGeom prst="line">
-            <a:avLst/>
-          </a:prstGeom>
-          <a:noFill/>
-          <a:ln w="22860">
+          <p:cNvPr id="4" name="Shape 2"/>
+          <p:cNvSpPr/>
+          <p:nvPr/>
+        </p:nvSpPr>
+        <p:spPr>
+          <a:xfrm>
+            <a:off x="320040" y="868680"/>
+            <a:ext cx="164592" cy="1645920"/>
+          </a:xfrm>
+          <a:prstGeom prst="rect">
+            <a:avLst/>
+          </a:prstGeom>
+          <a:solidFill>
+            <a:srgbClr val="FF9900"/>
+          </a:solidFill>
+          <a:ln w="12700">
             <a:solidFill>
-              <a:srgbClr val="1D4ED8"/>
+              <a:srgbClr val="FF9900"/>
             </a:solidFill>
             <a:prstDash val="solid"/>
           </a:ln>
@@ -4919,24 +5841,63 @@
       </p:sp>
       <p:sp>
         <p:nvSpPr>
-          <p:cNvPr id="4" name="Shape 2"/>
-          <p:cNvSpPr/>
-          <p:nvPr/>
-        </p:nvSpPr>
-        <p:spPr>
-          <a:xfrm>
-            <a:off x="502920" y="960120"/>
-            <a:ext cx="8138160" cy="749808"/>
+          <p:cNvPr id="5" name="Text 3"/>
+          <p:cNvSpPr/>
+          <p:nvPr/>
+        </p:nvSpPr>
+        <p:spPr>
+          <a:xfrm>
+            <a:off x="594360" y="868680"/>
+            <a:ext cx="8046720" cy="347472"/>
           </a:xfrm>
           <a:prstGeom prst="rect">
             <a:avLst/>
           </a:prstGeom>
+          <a:noFill/>
+          <a:ln/>
+        </p:spPr>
+        <p:txBody>
+          <a:bodyPr wrap="square" lIns="0" tIns="0" rIns="0" bIns="0" rtlCol="0" anchor="ctr"/>
+          <a:lstStyle/>
+          <a:p>
+            <a:pPr marL="0" indent="0">
+              <a:buNone/>
+            </a:pPr>
+            <a:r>
+              <a:rPr lang="en-US" sz="1400" b="1" dirty="0">
+                <a:solidFill>
+                  <a:srgbClr val="0D1B2A"/>
+                </a:solidFill>
+                <a:latin typeface="Calibri" pitchFamily="34" charset="0"/>
+                <a:ea typeface="Calibri" pitchFamily="34" charset="-122"/>
+                <a:cs typeface="Calibri" pitchFamily="34" charset="-120"/>
+              </a:rPr>
+              <a:t>Top Selling Products</a:t>
+            </a:r>
+            <a:endParaRPr lang="en-US" sz="1400" dirty="0"/>
+          </a:p>
+        </p:txBody>
+      </p:sp>
+      <p:sp>
+        <p:nvSpPr>
+          <p:cNvPr id="6" name="Shape 4"/>
+          <p:cNvSpPr/>
+          <p:nvPr/>
+        </p:nvSpPr>
+        <p:spPr>
+          <a:xfrm>
+            <a:off x="594360" y="1234440"/>
+            <a:ext cx="8229600" cy="1188720"/>
+          </a:xfrm>
+          <a:prstGeom prst="rect">
+            <a:avLst/>
+          </a:prstGeom>
           <a:solidFill>
-            <a:srgbClr val="F3F4F6"/>
+            <a:srgbClr val="1A1A2E"/>
           </a:solidFill>
-          <a:ln w="10160">
+          <a:ln w="12700">
             <a:solidFill>
-              <a:srgbClr val="E5E7EB"/>
+              <a:srgbClr val="FF9900"/>
             </a:solidFill>
             <a:prstDash val="solid"/>
           </a:ln>
@@ -4944,14 +5905,14 @@
       </p:sp>
       <p:sp>
         <p:nvSpPr>
-          <p:cNvPr id="5" name="Text 3"/>
-          <p:cNvSpPr/>
-          <p:nvPr/>
-        </p:nvSpPr>
-        <p:spPr>
-          <a:xfrm>
-            <a:off x="640080" y="1005840"/>
-            <a:ext cx="1371600" cy="310896"/>
+          <p:cNvPr id="7" name="Text 5"/>
+          <p:cNvSpPr/>
+          <p:nvPr/>
+        </p:nvSpPr>
+        <p:spPr>
+          <a:xfrm>
+            <a:off x="749808" y="1271016"/>
+            <a:ext cx="7955280" cy="1097280"/>
           </a:xfrm>
           <a:prstGeom prst="rect">
             <a:avLst/>
@@ -4967,30 +5928,140 @@
               <a:buNone/>
             </a:pPr>
             <a:r>
-              <a:rPr lang="en-US" sz="1250" b="1" dirty="0">
-                <a:solidFill>
-                  <a:srgbClr val="1D4ED8"/>
-                </a:solidFill>
-                <a:latin typeface="Courier New" pitchFamily="34" charset="0"/>
-                <a:ea typeface="Courier New" pitchFamily="34" charset="-122"/>
-                <a:cs typeface="Courier New" pitchFamily="34" charset="-120"/>
-              </a:rPr>
-              <a:t>WHERE</a:t>
-            </a:r>
-            <a:endParaRPr lang="en-US" sz="1250" dirty="0"/>
+              <a:rPr lang="en-US" sz="1050" dirty="0">
+                <a:solidFill>
+                  <a:srgbClr val="E2F0CB"/>
+                </a:solidFill>
+                <a:latin typeface="Consolas" pitchFamily="34" charset="0"/>
+                <a:ea typeface="Consolas" pitchFamily="34" charset="-122"/>
+                <a:cs typeface="Consolas" pitchFamily="34" charset="-120"/>
+              </a:rPr>
+              <a:t>SELECT product_name, SUM(quantity_sold) AS total_sold</a:t>
+            </a:r>
+            <a:endParaRPr lang="en-US" sz="1050" dirty="0"/>
+          </a:p>
+          <a:p>
+            <a:pPr marL="0" indent="0">
+              <a:buNone/>
+            </a:pPr>
+            <a:r>
+              <a:rPr lang="en-US" sz="1050" dirty="0">
+                <a:solidFill>
+                  <a:srgbClr val="E2F0CB"/>
+                </a:solidFill>
+                <a:latin typeface="Consolas" pitchFamily="34" charset="0"/>
+                <a:ea typeface="Consolas" pitchFamily="34" charset="-122"/>
+                <a:cs typeface="Consolas" pitchFamily="34" charset="-120"/>
+              </a:rPr>
+              <a:t>FROM orders</a:t>
+            </a:r>
+            <a:endParaRPr lang="en-US" sz="1050" dirty="0"/>
+          </a:p>
+          <a:p>
+            <a:pPr marL="0" indent="0">
+              <a:buNone/>
+            </a:pPr>
+            <a:r>
+              <a:rPr lang="en-US" sz="1050" dirty="0">
+                <a:solidFill>
+                  <a:srgbClr val="E2F0CB"/>
+                </a:solidFill>
+                <a:latin typeface="Consolas" pitchFamily="34" charset="0"/>
+                <a:ea typeface="Consolas" pitchFamily="34" charset="-122"/>
+                <a:cs typeface="Consolas" pitchFamily="34" charset="-120"/>
+              </a:rPr>
+              <a:t>WHERE order_date &gt;= '2024-01-01'</a:t>
+            </a:r>
+            <a:endParaRPr lang="en-US" sz="1050" dirty="0"/>
+          </a:p>
+          <a:p>
+            <a:pPr marL="0" indent="0">
+              <a:buNone/>
+            </a:pPr>
+            <a:r>
+              <a:rPr lang="en-US" sz="1050" dirty="0">
+                <a:solidFill>
+                  <a:srgbClr val="E2F0CB"/>
+                </a:solidFill>
+                <a:latin typeface="Consolas" pitchFamily="34" charset="0"/>
+                <a:ea typeface="Consolas" pitchFamily="34" charset="-122"/>
+                <a:cs typeface="Consolas" pitchFamily="34" charset="-120"/>
+              </a:rPr>
+              <a:t>GROUP BY product_name</a:t>
+            </a:r>
+            <a:endParaRPr lang="en-US" sz="1050" dirty="0"/>
+          </a:p>
+          <a:p>
+            <a:pPr marL="0" indent="0">
+              <a:buNone/>
+            </a:pPr>
+            <a:r>
+              <a:rPr lang="en-US" sz="1050" dirty="0">
+                <a:solidFill>
+                  <a:srgbClr val="E2F0CB"/>
+                </a:solidFill>
+                <a:latin typeface="Consolas" pitchFamily="34" charset="0"/>
+                <a:ea typeface="Consolas" pitchFamily="34" charset="-122"/>
+                <a:cs typeface="Consolas" pitchFamily="34" charset="-120"/>
+              </a:rPr>
+              <a:t>ORDER BY total_sold DESC</a:t>
+            </a:r>
+            <a:endParaRPr lang="en-US" sz="1050" dirty="0"/>
+          </a:p>
+          <a:p>
+            <a:pPr marL="0" indent="0">
+              <a:buNone/>
+            </a:pPr>
+            <a:r>
+              <a:rPr lang="en-US" sz="1050" dirty="0">
+                <a:solidFill>
+                  <a:srgbClr val="E2F0CB"/>
+                </a:solidFill>
+                <a:latin typeface="Consolas" pitchFamily="34" charset="0"/>
+                <a:ea typeface="Consolas" pitchFamily="34" charset="-122"/>
+                <a:cs typeface="Consolas" pitchFamily="34" charset="-120"/>
+              </a:rPr>
+              <a:t>LIMIT 10;</a:t>
+            </a:r>
+            <a:endParaRPr lang="en-US" sz="1050" dirty="0"/>
           </a:p>
         </p:txBody>
       </p:sp>
       <p:sp>
         <p:nvSpPr>
-          <p:cNvPr id="6" name="Text 4"/>
-          <p:cNvSpPr/>
-          <p:nvPr/>
-        </p:nvSpPr>
-        <p:spPr>
-          <a:xfrm>
-            <a:off x="640080" y="1344168"/>
-            <a:ext cx="1600200" cy="274320"/>
+          <p:cNvPr id="8" name="Shape 6"/>
+          <p:cNvSpPr/>
+          <p:nvPr/>
+        </p:nvSpPr>
+        <p:spPr>
+          <a:xfrm>
+            <a:off x="320040" y="2880360"/>
+            <a:ext cx="164592" cy="1645920"/>
+          </a:xfrm>
+          <a:prstGeom prst="rect">
+            <a:avLst/>
+          </a:prstGeom>
+          <a:solidFill>
+            <a:srgbClr val="FF9900"/>
+          </a:solidFill>
+          <a:ln w="12700">
+            <a:solidFill>
+              <a:srgbClr val="FF9900"/>
+            </a:solidFill>
+            <a:prstDash val="solid"/>
+          </a:ln>
+        </p:spPr>
+      </p:sp>
+      <p:sp>
+        <p:nvSpPr>
+          <p:cNvPr id="9" name="Text 7"/>
+          <p:cNvSpPr/>
+          <p:nvPr/>
+        </p:nvSpPr>
+        <p:spPr>
+          <a:xfrm>
+            <a:off x="594360" y="2880360"/>
+            <a:ext cx="8046720" cy="347472"/>
           </a:xfrm>
           <a:prstGeom prst="rect">
             <a:avLst/>
@@ -5006,38 +6077,40 @@
               <a:buNone/>
             </a:pPr>
             <a:r>
-              <a:rPr lang="en-US" sz="1050" dirty="0">
-                <a:solidFill>
-                  <a:srgbClr val="6B7280"/>
+              <a:rPr lang="en-US" sz="1400" b="1" dirty="0">
+                <a:solidFill>
+                  <a:srgbClr val="0D1B2A"/>
                 </a:solidFill>
                 <a:latin typeface="Calibri" pitchFamily="34" charset="0"/>
                 <a:ea typeface="Calibri" pitchFamily="34" charset="-122"/>
                 <a:cs typeface="Calibri" pitchFamily="34" charset="-120"/>
               </a:rPr>
-              <a:t>Filter rows by a condition</a:t>
-            </a:r>
-            <a:endParaRPr lang="en-US" sz="1050" dirty="0"/>
+              <a:t>Customers with Large Orders</a:t>
+            </a:r>
+            <a:endParaRPr lang="en-US" sz="1400" dirty="0"/>
           </a:p>
         </p:txBody>
       </p:sp>
       <p:sp>
         <p:nvSpPr>
-          <p:cNvPr id="7" name="Shape 5"/>
-          <p:cNvSpPr/>
-          <p:nvPr/>
-        </p:nvSpPr>
-        <p:spPr>
-          <a:xfrm>
-            <a:off x="2240280" y="1051560"/>
-            <a:ext cx="0" cy="566928"/>
-          </a:xfrm>
-          <a:prstGeom prst="line">
-            <a:avLst/>
-          </a:prstGeom>
-          <a:noFill/>
-          <a:ln w="10160">
+          <p:cNvPr id="10" name="Shape 8"/>
+          <p:cNvSpPr/>
+          <p:nvPr/>
+        </p:nvSpPr>
+        <p:spPr>
+          <a:xfrm>
+            <a:off x="594360" y="3246120"/>
+            <a:ext cx="8229600" cy="1188720"/>
+          </a:xfrm>
+          <a:prstGeom prst="rect">
+            <a:avLst/>
+          </a:prstGeom>
+          <a:solidFill>
+            <a:srgbClr val="1A1A2E"/>
+          </a:solidFill>
+          <a:ln w="12700">
             <a:solidFill>
-              <a:srgbClr val="E5E7EB"/>
+              <a:srgbClr val="FF9900"/>
             </a:solidFill>
             <a:prstDash val="solid"/>
           </a:ln>
@@ -5045,14 +6118,14 @@
       </p:sp>
       <p:sp>
         <p:nvSpPr>
-          <p:cNvPr id="8" name="Text 6"/>
-          <p:cNvSpPr/>
-          <p:nvPr/>
-        </p:nvSpPr>
-        <p:spPr>
-          <a:xfrm>
-            <a:off x="2377440" y="1124712"/>
-            <a:ext cx="6080760" cy="420624"/>
+          <p:cNvPr id="11" name="Text 9"/>
+          <p:cNvSpPr/>
+          <p:nvPr/>
+        </p:nvSpPr>
+        <p:spPr>
+          <a:xfrm>
+            <a:off x="749808" y="3282696"/>
+            <a:ext cx="7955280" cy="1097280"/>
           </a:xfrm>
           <a:prstGeom prst="rect">
             <a:avLst/>
@@ -5068,55 +6141,98 @@
               <a:buNone/>
             </a:pPr>
             <a:r>
-              <a:rPr lang="en-US" sz="1150" dirty="0">
-                <a:solidFill>
-                  <a:srgbClr val="374151"/>
-                </a:solidFill>
-                <a:latin typeface="Courier New" pitchFamily="34" charset="0"/>
-                <a:ea typeface="Courier New" pitchFamily="34" charset="-122"/>
-                <a:cs typeface="Courier New" pitchFamily="34" charset="-120"/>
-              </a:rPr>
-              <a:t>SELECT * FROM employees WHERE department = 'Engineering';</a:t>
-            </a:r>
-            <a:endParaRPr lang="en-US" sz="1150" dirty="0"/>
+              <a:rPr lang="en-US" sz="1050" dirty="0">
+                <a:solidFill>
+                  <a:srgbClr val="E2F0CB"/>
+                </a:solidFill>
+                <a:latin typeface="Consolas" pitchFamily="34" charset="0"/>
+                <a:ea typeface="Consolas" pitchFamily="34" charset="-122"/>
+                <a:cs typeface="Consolas" pitchFamily="34" charset="-120"/>
+              </a:rPr>
+              <a:t>SELECT customer_id, name, email, total_amount</a:t>
+            </a:r>
+            <a:endParaRPr lang="en-US" sz="1050" dirty="0"/>
+          </a:p>
+          <a:p>
+            <a:pPr marL="0" indent="0">
+              <a:buNone/>
+            </a:pPr>
+            <a:r>
+              <a:rPr lang="en-US" sz="1050" dirty="0">
+                <a:solidFill>
+                  <a:srgbClr val="E2F0CB"/>
+                </a:solidFill>
+                <a:latin typeface="Consolas" pitchFamily="34" charset="0"/>
+                <a:ea typeface="Consolas" pitchFamily="34" charset="-122"/>
+                <a:cs typeface="Consolas" pitchFamily="34" charset="-120"/>
+              </a:rPr>
+              <a:t>FROM customers</a:t>
+            </a:r>
+            <a:endParaRPr lang="en-US" sz="1050" dirty="0"/>
+          </a:p>
+          <a:p>
+            <a:pPr marL="0" indent="0">
+              <a:buNone/>
+            </a:pPr>
+            <a:r>
+              <a:rPr lang="en-US" sz="1050" dirty="0">
+                <a:solidFill>
+                  <a:srgbClr val="E2F0CB"/>
+                </a:solidFill>
+                <a:latin typeface="Consolas" pitchFamily="34" charset="0"/>
+                <a:ea typeface="Consolas" pitchFamily="34" charset="-122"/>
+                <a:cs typeface="Consolas" pitchFamily="34" charset="-120"/>
+              </a:rPr>
+              <a:t>WHERE total_amount &gt; 5000</a:t>
+            </a:r>
+            <a:endParaRPr lang="en-US" sz="1050" dirty="0"/>
+          </a:p>
+          <a:p>
+            <a:pPr marL="0" indent="0">
+              <a:buNone/>
+            </a:pPr>
+            <a:r>
+              <a:rPr lang="en-US" sz="1050" dirty="0">
+                <a:solidFill>
+                  <a:srgbClr val="E2F0CB"/>
+                </a:solidFill>
+                <a:latin typeface="Consolas" pitchFamily="34" charset="0"/>
+                <a:ea typeface="Consolas" pitchFamily="34" charset="-122"/>
+                <a:cs typeface="Consolas" pitchFamily="34" charset="-120"/>
+              </a:rPr>
+              <a:t>  AND country = 'India'</a:t>
+            </a:r>
+            <a:endParaRPr lang="en-US" sz="1050" dirty="0"/>
+          </a:p>
+          <a:p>
+            <a:pPr marL="0" indent="0">
+              <a:buNone/>
+            </a:pPr>
+            <a:r>
+              <a:rPr lang="en-US" sz="1050" dirty="0">
+                <a:solidFill>
+                  <a:srgbClr val="E2F0CB"/>
+                </a:solidFill>
+                <a:latin typeface="Consolas" pitchFamily="34" charset="0"/>
+                <a:ea typeface="Consolas" pitchFamily="34" charset="-122"/>
+                <a:cs typeface="Consolas" pitchFamily="34" charset="-120"/>
+              </a:rPr>
+              <a:t>ORDER BY total_amount DESC;</a:t>
+            </a:r>
+            <a:endParaRPr lang="en-US" sz="1050" dirty="0"/>
           </a:p>
         </p:txBody>
       </p:sp>
       <p:sp>
         <p:nvSpPr>
-          <p:cNvPr id="9" name="Shape 7"/>
-          <p:cNvSpPr/>
-          <p:nvPr/>
-        </p:nvSpPr>
-        <p:spPr>
-          <a:xfrm>
-            <a:off x="502920" y="1764792"/>
-            <a:ext cx="8138160" cy="749808"/>
-          </a:xfrm>
-          <a:prstGeom prst="rect">
-            <a:avLst/>
-          </a:prstGeom>
-          <a:solidFill>
-            <a:srgbClr val="FFFFFF"/>
-          </a:solidFill>
-          <a:ln w="10160">
-            <a:solidFill>
-              <a:srgbClr val="E5E7EB"/>
-            </a:solidFill>
-            <a:prstDash val="solid"/>
-          </a:ln>
-        </p:spPr>
-      </p:sp>
-      <p:sp>
-        <p:nvSpPr>
-          <p:cNvPr id="10" name="Text 8"/>
-          <p:cNvSpPr/>
-          <p:nvPr/>
-        </p:nvSpPr>
-        <p:spPr>
-          <a:xfrm>
-            <a:off x="640080" y="1810512"/>
-            <a:ext cx="1371600" cy="310896"/>
+          <p:cNvPr id="12" name="Text 10"/>
+          <p:cNvSpPr/>
+          <p:nvPr/>
+        </p:nvSpPr>
+        <p:spPr>
+          <a:xfrm>
+            <a:off x="320040" y="4754880"/>
+            <a:ext cx="8503920" cy="292608"/>
           </a:xfrm>
           <a:prstGeom prst="rect">
             <a:avLst/>
@@ -5132,613 +6248,17 @@
               <a:buNone/>
             </a:pPr>
             <a:r>
-              <a:rPr lang="en-US" sz="1250" b="1" dirty="0">
-                <a:solidFill>
-                  <a:srgbClr val="1D4ED8"/>
-                </a:solidFill>
-                <a:latin typeface="Courier New" pitchFamily="34" charset="0"/>
-                <a:ea typeface="Courier New" pitchFamily="34" charset="-122"/>
-                <a:cs typeface="Courier New" pitchFamily="34" charset="-120"/>
-              </a:rPr>
-              <a:t>ORDER BY</a:t>
-            </a:r>
-            <a:endParaRPr lang="en-US" sz="1250" dirty="0"/>
-          </a:p>
-        </p:txBody>
-      </p:sp>
-      <p:sp>
-        <p:nvSpPr>
-          <p:cNvPr id="11" name="Text 9"/>
-          <p:cNvSpPr/>
-          <p:nvPr/>
-        </p:nvSpPr>
-        <p:spPr>
-          <a:xfrm>
-            <a:off x="640080" y="2148840"/>
-            <a:ext cx="1600200" cy="274320"/>
-          </a:xfrm>
-          <a:prstGeom prst="rect">
-            <a:avLst/>
-          </a:prstGeom>
-          <a:noFill/>
-          <a:ln/>
-        </p:spPr>
-        <p:txBody>
-          <a:bodyPr wrap="square" lIns="0" tIns="0" rIns="0" bIns="0" rtlCol="0" anchor="ctr"/>
-          <a:lstStyle/>
-          <a:p>
-            <a:pPr marL="0" indent="0">
-              <a:buNone/>
-            </a:pPr>
-            <a:r>
-              <a:rPr lang="en-US" sz="1050" dirty="0">
-                <a:solidFill>
-                  <a:srgbClr val="6B7280"/>
+              <a:rPr lang="en-US" sz="1100" i="1" dirty="0">
+                <a:solidFill>
+                  <a:srgbClr val="64748B"/>
                 </a:solidFill>
                 <a:latin typeface="Calibri" pitchFamily="34" charset="0"/>
                 <a:ea typeface="Calibri" pitchFamily="34" charset="-122"/>
                 <a:cs typeface="Calibri" pitchFamily="34" charset="-120"/>
               </a:rPr>
-              <a:t>Sort results</a:t>
-            </a:r>
-            <a:endParaRPr lang="en-US" sz="1050" dirty="0"/>
-          </a:p>
-        </p:txBody>
-      </p:sp>
-      <p:sp>
-        <p:nvSpPr>
-          <p:cNvPr id="12" name="Shape 10"/>
-          <p:cNvSpPr/>
-          <p:nvPr/>
-        </p:nvSpPr>
-        <p:spPr>
-          <a:xfrm>
-            <a:off x="2240280" y="1856232"/>
-            <a:ext cx="0" cy="566928"/>
-          </a:xfrm>
-          <a:prstGeom prst="line">
-            <a:avLst/>
-          </a:prstGeom>
-          <a:noFill/>
-          <a:ln w="10160">
-            <a:solidFill>
-              <a:srgbClr val="E5E7EB"/>
-            </a:solidFill>
-            <a:prstDash val="solid"/>
-          </a:ln>
-        </p:spPr>
-      </p:sp>
-      <p:sp>
-        <p:nvSpPr>
-          <p:cNvPr id="13" name="Text 11"/>
-          <p:cNvSpPr/>
-          <p:nvPr/>
-        </p:nvSpPr>
-        <p:spPr>
-          <a:xfrm>
-            <a:off x="2377440" y="1929384"/>
-            <a:ext cx="6080760" cy="420624"/>
-          </a:xfrm>
-          <a:prstGeom prst="rect">
-            <a:avLst/>
-          </a:prstGeom>
-          <a:noFill/>
-          <a:ln/>
-        </p:spPr>
-        <p:txBody>
-          <a:bodyPr wrap="square" lIns="0" tIns="0" rIns="0" bIns="0" rtlCol="0" anchor="ctr"/>
-          <a:lstStyle/>
-          <a:p>
-            <a:pPr marL="0" indent="0">
-              <a:buNone/>
-            </a:pPr>
-            <a:r>
-              <a:rPr lang="en-US" sz="1150" dirty="0">
-                <a:solidFill>
-                  <a:srgbClr val="374151"/>
-                </a:solidFill>
-                <a:latin typeface="Courier New" pitchFamily="34" charset="0"/>
-                <a:ea typeface="Courier New" pitchFamily="34" charset="-122"/>
-                <a:cs typeface="Courier New" pitchFamily="34" charset="-120"/>
-              </a:rPr>
-              <a:t>SELECT name, salary FROM employees ORDER BY salary DESC;</a:t>
-            </a:r>
-            <a:endParaRPr lang="en-US" sz="1150" dirty="0"/>
-          </a:p>
-        </p:txBody>
-      </p:sp>
-      <p:sp>
-        <p:nvSpPr>
-          <p:cNvPr id="14" name="Shape 12"/>
-          <p:cNvSpPr/>
-          <p:nvPr/>
-        </p:nvSpPr>
-        <p:spPr>
-          <a:xfrm>
-            <a:off x="502920" y="2569464"/>
-            <a:ext cx="8138160" cy="749808"/>
-          </a:xfrm>
-          <a:prstGeom prst="rect">
-            <a:avLst/>
-          </a:prstGeom>
-          <a:solidFill>
-            <a:srgbClr val="F3F4F6"/>
-          </a:solidFill>
-          <a:ln w="10160">
-            <a:solidFill>
-              <a:srgbClr val="E5E7EB"/>
-            </a:solidFill>
-            <a:prstDash val="solid"/>
-          </a:ln>
-        </p:spPr>
-      </p:sp>
-      <p:sp>
-        <p:nvSpPr>
-          <p:cNvPr id="15" name="Text 13"/>
-          <p:cNvSpPr/>
-          <p:nvPr/>
-        </p:nvSpPr>
-        <p:spPr>
-          <a:xfrm>
-            <a:off x="640080" y="2615184"/>
-            <a:ext cx="1371600" cy="310896"/>
-          </a:xfrm>
-          <a:prstGeom prst="rect">
-            <a:avLst/>
-          </a:prstGeom>
-          <a:noFill/>
-          <a:ln/>
-        </p:spPr>
-        <p:txBody>
-          <a:bodyPr wrap="square" lIns="0" tIns="0" rIns="0" bIns="0" rtlCol="0" anchor="ctr"/>
-          <a:lstStyle/>
-          <a:p>
-            <a:pPr marL="0" indent="0">
-              <a:buNone/>
-            </a:pPr>
-            <a:r>
-              <a:rPr lang="en-US" sz="1250" b="1" dirty="0">
-                <a:solidFill>
-                  <a:srgbClr val="1D4ED8"/>
-                </a:solidFill>
-                <a:latin typeface="Courier New" pitchFamily="34" charset="0"/>
-                <a:ea typeface="Courier New" pitchFamily="34" charset="-122"/>
-                <a:cs typeface="Courier New" pitchFamily="34" charset="-120"/>
-              </a:rPr>
-              <a:t>LIMIT</a:t>
-            </a:r>
-            <a:endParaRPr lang="en-US" sz="1250" dirty="0"/>
-          </a:p>
-        </p:txBody>
-      </p:sp>
-      <p:sp>
-        <p:nvSpPr>
-          <p:cNvPr id="16" name="Text 14"/>
-          <p:cNvSpPr/>
-          <p:nvPr/>
-        </p:nvSpPr>
-        <p:spPr>
-          <a:xfrm>
-            <a:off x="640080" y="2953512"/>
-            <a:ext cx="1600200" cy="274320"/>
-          </a:xfrm>
-          <a:prstGeom prst="rect">
-            <a:avLst/>
-          </a:prstGeom>
-          <a:noFill/>
-          <a:ln/>
-        </p:spPr>
-        <p:txBody>
-          <a:bodyPr wrap="square" lIns="0" tIns="0" rIns="0" bIns="0" rtlCol="0" anchor="ctr"/>
-          <a:lstStyle/>
-          <a:p>
-            <a:pPr marL="0" indent="0">
-              <a:buNone/>
-            </a:pPr>
-            <a:r>
-              <a:rPr lang="en-US" sz="1050" dirty="0">
-                <a:solidFill>
-                  <a:srgbClr val="6B7280"/>
-                </a:solidFill>
-                <a:latin typeface="Calibri" pitchFamily="34" charset="0"/>
-                <a:ea typeface="Calibri" pitchFamily="34" charset="-122"/>
-                <a:cs typeface="Calibri" pitchFamily="34" charset="-120"/>
-              </a:rPr>
-              <a:t>Return only first N rows</a:t>
-            </a:r>
-            <a:endParaRPr lang="en-US" sz="1050" dirty="0"/>
-          </a:p>
-        </p:txBody>
-      </p:sp>
-      <p:sp>
-        <p:nvSpPr>
-          <p:cNvPr id="17" name="Shape 15"/>
-          <p:cNvSpPr/>
-          <p:nvPr/>
-        </p:nvSpPr>
-        <p:spPr>
-          <a:xfrm>
-            <a:off x="2240280" y="2660904"/>
-            <a:ext cx="0" cy="566928"/>
-          </a:xfrm>
-          <a:prstGeom prst="line">
-            <a:avLst/>
-          </a:prstGeom>
-          <a:noFill/>
-          <a:ln w="10160">
-            <a:solidFill>
-              <a:srgbClr val="E5E7EB"/>
-            </a:solidFill>
-            <a:prstDash val="solid"/>
-          </a:ln>
-        </p:spPr>
-      </p:sp>
-      <p:sp>
-        <p:nvSpPr>
-          <p:cNvPr id="18" name="Text 16"/>
-          <p:cNvSpPr/>
-          <p:nvPr/>
-        </p:nvSpPr>
-        <p:spPr>
-          <a:xfrm>
-            <a:off x="2377440" y="2734056"/>
-            <a:ext cx="6080760" cy="420624"/>
-          </a:xfrm>
-          <a:prstGeom prst="rect">
-            <a:avLst/>
-          </a:prstGeom>
-          <a:noFill/>
-          <a:ln/>
-        </p:spPr>
-        <p:txBody>
-          <a:bodyPr wrap="square" lIns="0" tIns="0" rIns="0" bIns="0" rtlCol="0" anchor="ctr"/>
-          <a:lstStyle/>
-          <a:p>
-            <a:pPr marL="0" indent="0">
-              <a:buNone/>
-            </a:pPr>
-            <a:r>
-              <a:rPr lang="en-US" sz="1150" dirty="0">
-                <a:solidFill>
-                  <a:srgbClr val="374151"/>
-                </a:solidFill>
-                <a:latin typeface="Courier New" pitchFamily="34" charset="0"/>
-                <a:ea typeface="Courier New" pitchFamily="34" charset="-122"/>
-                <a:cs typeface="Courier New" pitchFamily="34" charset="-120"/>
-              </a:rPr>
-              <a:t>SELECT * FROM products ORDER BY created_at DESC LIMIT 5;</a:t>
-            </a:r>
-            <a:endParaRPr lang="en-US" sz="1150" dirty="0"/>
-          </a:p>
-        </p:txBody>
-      </p:sp>
-      <p:sp>
-        <p:nvSpPr>
-          <p:cNvPr id="19" name="Shape 17"/>
-          <p:cNvSpPr/>
-          <p:nvPr/>
-        </p:nvSpPr>
-        <p:spPr>
-          <a:xfrm>
-            <a:off x="502920" y="3374136"/>
-            <a:ext cx="8138160" cy="749808"/>
-          </a:xfrm>
-          <a:prstGeom prst="rect">
-            <a:avLst/>
-          </a:prstGeom>
-          <a:solidFill>
-            <a:srgbClr val="FFFFFF"/>
-          </a:solidFill>
-          <a:ln w="10160">
-            <a:solidFill>
-              <a:srgbClr val="E5E7EB"/>
-            </a:solidFill>
-            <a:prstDash val="solid"/>
-          </a:ln>
-        </p:spPr>
-      </p:sp>
-      <p:sp>
-        <p:nvSpPr>
-          <p:cNvPr id="20" name="Text 18"/>
-          <p:cNvSpPr/>
-          <p:nvPr/>
-        </p:nvSpPr>
-        <p:spPr>
-          <a:xfrm>
-            <a:off x="640080" y="3419856"/>
-            <a:ext cx="1371600" cy="310896"/>
-          </a:xfrm>
-          <a:prstGeom prst="rect">
-            <a:avLst/>
-          </a:prstGeom>
-          <a:noFill/>
-          <a:ln/>
-        </p:spPr>
-        <p:txBody>
-          <a:bodyPr wrap="square" lIns="0" tIns="0" rIns="0" bIns="0" rtlCol="0" anchor="ctr"/>
-          <a:lstStyle/>
-          <a:p>
-            <a:pPr marL="0" indent="0">
-              <a:buNone/>
-            </a:pPr>
-            <a:r>
-              <a:rPr lang="en-US" sz="1250" b="1" dirty="0">
-                <a:solidFill>
-                  <a:srgbClr val="1D4ED8"/>
-                </a:solidFill>
-                <a:latin typeface="Courier New" pitchFamily="34" charset="0"/>
-                <a:ea typeface="Courier New" pitchFamily="34" charset="-122"/>
-                <a:cs typeface="Courier New" pitchFamily="34" charset="-120"/>
-              </a:rPr>
-              <a:t>DISTINCT</a:t>
-            </a:r>
-            <a:endParaRPr lang="en-US" sz="1250" dirty="0"/>
-          </a:p>
-        </p:txBody>
-      </p:sp>
-      <p:sp>
-        <p:nvSpPr>
-          <p:cNvPr id="21" name="Text 19"/>
-          <p:cNvSpPr/>
-          <p:nvPr/>
-        </p:nvSpPr>
-        <p:spPr>
-          <a:xfrm>
-            <a:off x="640080" y="3758184"/>
-            <a:ext cx="1600200" cy="274320"/>
-          </a:xfrm>
-          <a:prstGeom prst="rect">
-            <a:avLst/>
-          </a:prstGeom>
-          <a:noFill/>
-          <a:ln/>
-        </p:spPr>
-        <p:txBody>
-          <a:bodyPr wrap="square" lIns="0" tIns="0" rIns="0" bIns="0" rtlCol="0" anchor="ctr"/>
-          <a:lstStyle/>
-          <a:p>
-            <a:pPr marL="0" indent="0">
-              <a:buNone/>
-            </a:pPr>
-            <a:r>
-              <a:rPr lang="en-US" sz="1050" dirty="0">
-                <a:solidFill>
-                  <a:srgbClr val="6B7280"/>
-                </a:solidFill>
-                <a:latin typeface="Calibri" pitchFamily="34" charset="0"/>
-                <a:ea typeface="Calibri" pitchFamily="34" charset="-122"/>
-                <a:cs typeface="Calibri" pitchFamily="34" charset="-120"/>
-              </a:rPr>
-              <a:t>Remove duplicate values</a:t>
-            </a:r>
-            <a:endParaRPr lang="en-US" sz="1050" dirty="0"/>
-          </a:p>
-        </p:txBody>
-      </p:sp>
-      <p:sp>
-        <p:nvSpPr>
-          <p:cNvPr id="22" name="Shape 20"/>
-          <p:cNvSpPr/>
-          <p:nvPr/>
-        </p:nvSpPr>
-        <p:spPr>
-          <a:xfrm>
-            <a:off x="2240280" y="3465576"/>
-            <a:ext cx="0" cy="566928"/>
-          </a:xfrm>
-          <a:prstGeom prst="line">
-            <a:avLst/>
-          </a:prstGeom>
-          <a:noFill/>
-          <a:ln w="10160">
-            <a:solidFill>
-              <a:srgbClr val="E5E7EB"/>
-            </a:solidFill>
-            <a:prstDash val="solid"/>
-          </a:ln>
-        </p:spPr>
-      </p:sp>
-      <p:sp>
-        <p:nvSpPr>
-          <p:cNvPr id="23" name="Text 21"/>
-          <p:cNvSpPr/>
-          <p:nvPr/>
-        </p:nvSpPr>
-        <p:spPr>
-          <a:xfrm>
-            <a:off x="2377440" y="3538728"/>
-            <a:ext cx="6080760" cy="420624"/>
-          </a:xfrm>
-          <a:prstGeom prst="rect">
-            <a:avLst/>
-          </a:prstGeom>
-          <a:noFill/>
-          <a:ln/>
-        </p:spPr>
-        <p:txBody>
-          <a:bodyPr wrap="square" lIns="0" tIns="0" rIns="0" bIns="0" rtlCol="0" anchor="ctr"/>
-          <a:lstStyle/>
-          <a:p>
-            <a:pPr marL="0" indent="0">
-              <a:buNone/>
-            </a:pPr>
-            <a:r>
-              <a:rPr lang="en-US" sz="1150" dirty="0">
-                <a:solidFill>
-                  <a:srgbClr val="374151"/>
-                </a:solidFill>
-                <a:latin typeface="Courier New" pitchFamily="34" charset="0"/>
-                <a:ea typeface="Courier New" pitchFamily="34" charset="-122"/>
-                <a:cs typeface="Courier New" pitchFamily="34" charset="-120"/>
-              </a:rPr>
-              <a:t>SELECT DISTINCT city FROM customers;</a:t>
-            </a:r>
-            <a:endParaRPr lang="en-US" sz="1150" dirty="0"/>
-          </a:p>
-        </p:txBody>
-      </p:sp>
-      <p:sp>
-        <p:nvSpPr>
-          <p:cNvPr id="24" name="Shape 22"/>
-          <p:cNvSpPr/>
-          <p:nvPr/>
-        </p:nvSpPr>
-        <p:spPr>
-          <a:xfrm>
-            <a:off x="502920" y="4178808"/>
-            <a:ext cx="8138160" cy="749808"/>
-          </a:xfrm>
-          <a:prstGeom prst="rect">
-            <a:avLst/>
-          </a:prstGeom>
-          <a:solidFill>
-            <a:srgbClr val="F3F4F6"/>
-          </a:solidFill>
-          <a:ln w="10160">
-            <a:solidFill>
-              <a:srgbClr val="E5E7EB"/>
-            </a:solidFill>
-            <a:prstDash val="solid"/>
-          </a:ln>
-        </p:spPr>
-      </p:sp>
-      <p:sp>
-        <p:nvSpPr>
-          <p:cNvPr id="25" name="Text 23"/>
-          <p:cNvSpPr/>
-          <p:nvPr/>
-        </p:nvSpPr>
-        <p:spPr>
-          <a:xfrm>
-            <a:off x="640080" y="4224528"/>
-            <a:ext cx="1371600" cy="310896"/>
-          </a:xfrm>
-          <a:prstGeom prst="rect">
-            <a:avLst/>
-          </a:prstGeom>
-          <a:noFill/>
-          <a:ln/>
-        </p:spPr>
-        <p:txBody>
-          <a:bodyPr wrap="square" lIns="0" tIns="0" rIns="0" bIns="0" rtlCol="0" anchor="ctr"/>
-          <a:lstStyle/>
-          <a:p>
-            <a:pPr marL="0" indent="0">
-              <a:buNone/>
-            </a:pPr>
-            <a:r>
-              <a:rPr lang="en-US" sz="1250" b="1" dirty="0">
-                <a:solidFill>
-                  <a:srgbClr val="1D4ED8"/>
-                </a:solidFill>
-                <a:latin typeface="Courier New" pitchFamily="34" charset="0"/>
-                <a:ea typeface="Courier New" pitchFamily="34" charset="-122"/>
-                <a:cs typeface="Courier New" pitchFamily="34" charset="-120"/>
-              </a:rPr>
-              <a:t>LIKE</a:t>
-            </a:r>
-            <a:endParaRPr lang="en-US" sz="1250" dirty="0"/>
-          </a:p>
-        </p:txBody>
-      </p:sp>
-      <p:sp>
-        <p:nvSpPr>
-          <p:cNvPr id="26" name="Text 24"/>
-          <p:cNvSpPr/>
-          <p:nvPr/>
-        </p:nvSpPr>
-        <p:spPr>
-          <a:xfrm>
-            <a:off x="640080" y="4562856"/>
-            <a:ext cx="1600200" cy="274320"/>
-          </a:xfrm>
-          <a:prstGeom prst="rect">
-            <a:avLst/>
-          </a:prstGeom>
-          <a:noFill/>
-          <a:ln/>
-        </p:spPr>
-        <p:txBody>
-          <a:bodyPr wrap="square" lIns="0" tIns="0" rIns="0" bIns="0" rtlCol="0" anchor="ctr"/>
-          <a:lstStyle/>
-          <a:p>
-            <a:pPr marL="0" indent="0">
-              <a:buNone/>
-            </a:pPr>
-            <a:r>
-              <a:rPr lang="en-US" sz="1050" dirty="0">
-                <a:solidFill>
-                  <a:srgbClr val="6B7280"/>
-                </a:solidFill>
-                <a:latin typeface="Calibri" pitchFamily="34" charset="0"/>
-                <a:ea typeface="Calibri" pitchFamily="34" charset="-122"/>
-                <a:cs typeface="Calibri" pitchFamily="34" charset="-120"/>
-              </a:rPr>
-              <a:t>Pattern search (% = wildcard)</a:t>
-            </a:r>
-            <a:endParaRPr lang="en-US" sz="1050" dirty="0"/>
-          </a:p>
-        </p:txBody>
-      </p:sp>
-      <p:sp>
-        <p:nvSpPr>
-          <p:cNvPr id="27" name="Shape 25"/>
-          <p:cNvSpPr/>
-          <p:nvPr/>
-        </p:nvSpPr>
-        <p:spPr>
-          <a:xfrm>
-            <a:off x="2240280" y="4270248"/>
-            <a:ext cx="0" cy="566928"/>
-          </a:xfrm>
-          <a:prstGeom prst="line">
-            <a:avLst/>
-          </a:prstGeom>
-          <a:noFill/>
-          <a:ln w="10160">
-            <a:solidFill>
-              <a:srgbClr val="E5E7EB"/>
-            </a:solidFill>
-            <a:prstDash val="solid"/>
-          </a:ln>
-        </p:spPr>
-      </p:sp>
-      <p:sp>
-        <p:nvSpPr>
-          <p:cNvPr id="28" name="Text 26"/>
-          <p:cNvSpPr/>
-          <p:nvPr/>
-        </p:nvSpPr>
-        <p:spPr>
-          <a:xfrm>
-            <a:off x="2377440" y="4343400"/>
-            <a:ext cx="6080760" cy="420624"/>
-          </a:xfrm>
-          <a:prstGeom prst="rect">
-            <a:avLst/>
-          </a:prstGeom>
-          <a:noFill/>
-          <a:ln/>
-        </p:spPr>
-        <p:txBody>
-          <a:bodyPr wrap="square" lIns="0" tIns="0" rIns="0" bIns="0" rtlCol="0" anchor="ctr"/>
-          <a:lstStyle/>
-          <a:p>
-            <a:pPr marL="0" indent="0">
-              <a:buNone/>
-            </a:pPr>
-            <a:r>
-              <a:rPr lang="en-US" sz="1150" dirty="0">
-                <a:solidFill>
-                  <a:srgbClr val="374151"/>
-                </a:solidFill>
-                <a:latin typeface="Courier New" pitchFamily="34" charset="0"/>
-                <a:ea typeface="Courier New" pitchFamily="34" charset="-122"/>
-                <a:cs typeface="Courier New" pitchFamily="34" charset="-120"/>
-              </a:rPr>
-              <a:t>SELECT * FROM users WHERE email LIKE '%@gmail.com';</a:t>
-            </a:r>
-            <a:endParaRPr lang="en-US" sz="1150" dirty="0"/>
+              <a:t>Use case: Amazon uses such queries to power product recommendations &amp; customer dashboards.</a:t>
+            </a:r>
+            <a:endParaRPr lang="en-US" sz="1100" dirty="0"/>
           </a:p>
         </p:txBody>
       </p:sp>
@@ -5747,13 +6267,13 @@
   <p:clrMapOvr>
     <a:masterClrMapping/>
   </p:clrMapOvr>
-  <mc:AlternateContent xmlns:mc="http://schemas.openxmlformats.org/markup-compatibility/2006" xmlns:p14="http://schemas.microsoft.com/office/powerpoint/2010/main">
-    <mc:Choice Requires="p14">
+  <mc:AlternateContent xmlns:mc="http://schemas.openxmlformats.org/markup-compatibility/2006">
+    <mc:Choice xmlns:p14="http://schemas.microsoft.com/office/powerpoint/2010/main" Requires="p14">
       <p:transition spd="slow" p14:dur="800">
         <p:circle/>
       </p:transition>
     </mc:Choice>
-    <mc:Fallback xmlns="">
+    <mc:Fallback>
       <p:transition spd="slow">
         <p:circle/>
       </p:transition>
@@ -5762,17 +6282,9 @@
 </p:sld>
 </file>
 
-<file path=ppt/slides/slide6.xml><?xml version="1.0" encoding="utf-8"?>
+<file path=ppt/slides/slide7.xml><?xml version="1.0" encoding="utf-8"?>
 <p:sld xmlns:a="http://schemas.openxmlformats.org/drawingml/2006/main" xmlns:r="http://schemas.openxmlformats.org/officeDocument/2006/relationships" xmlns:p="http://schemas.openxmlformats.org/presentationml/2006/main">
-  <p:cSld name="Slide 6">
-    <p:bg>
-      <p:bgPr>
-        <a:solidFill>
-          <a:srgbClr val="FFFFFF"/>
-        </a:solidFill>
-        <a:effectLst/>
-      </p:bgPr>
-    </p:bg>
+  <p:cSld>
     <p:spTree>
       <p:nvGrpSpPr>
         <p:cNvPr id="1" name=""/>
@@ -5789,14 +6301,39 @@
       </p:grpSpPr>
       <p:sp>
         <p:nvSpPr>
-          <p:cNvPr id="2" name="Text 0"/>
-          <p:cNvSpPr/>
-          <p:nvPr/>
-        </p:nvSpPr>
-        <p:spPr>
-          <a:xfrm>
-            <a:off x="502920" y="256032"/>
-            <a:ext cx="8138160" cy="502920"/>
+          <p:cNvPr id="2" name="Shape 0"/>
+          <p:cNvSpPr/>
+          <p:nvPr/>
+        </p:nvSpPr>
+        <p:spPr>
+          <a:xfrm>
+            <a:off x="0" y="0"/>
+            <a:ext cx="9144000" cy="685800"/>
+          </a:xfrm>
+          <a:prstGeom prst="rect">
+            <a:avLst/>
+          </a:prstGeom>
+          <a:solidFill>
+            <a:srgbClr val="E50914"/>
+          </a:solidFill>
+          <a:ln w="12700">
+            <a:solidFill>
+              <a:srgbClr val="E50914"/>
+            </a:solidFill>
+            <a:prstDash val="solid"/>
+          </a:ln>
+        </p:spPr>
+      </p:sp>
+      <p:sp>
+        <p:nvSpPr>
+          <p:cNvPr id="3" name="Text 1"/>
+          <p:cNvSpPr/>
+          <p:nvPr/>
+        </p:nvSpPr>
+        <p:spPr>
+          <a:xfrm>
+            <a:off x="320040" y="91440"/>
+            <a:ext cx="8229600" cy="502920"/>
           </a:xfrm>
           <a:prstGeom prst="rect">
             <a:avLst/>
@@ -5812,38 +6349,40 @@
               <a:buNone/>
             </a:pPr>
             <a:r>
-              <a:rPr lang="en-US" sz="2700" b="1" dirty="0">
-                <a:solidFill>
-                  <a:srgbClr val="111827"/>
+              <a:rPr lang="en-US" sz="2200" b="1" dirty="0">
+                <a:solidFill>
+                  <a:srgbClr val="FFFFFF"/>
                 </a:solidFill>
                 <a:latin typeface="Calibri" pitchFamily="34" charset="0"/>
                 <a:ea typeface="Calibri" pitchFamily="34" charset="-122"/>
                 <a:cs typeface="Calibri" pitchFamily="34" charset="-120"/>
               </a:rPr>
-              <a:t>Aggregate Functions + GROUP BY</a:t>
-            </a:r>
-            <a:endParaRPr lang="en-US" sz="2700" dirty="0"/>
+              <a:t>🎬  Netflix — Streaming Analytics</a:t>
+            </a:r>
+            <a:endParaRPr lang="en-US" sz="2200" dirty="0"/>
           </a:p>
         </p:txBody>
       </p:sp>
       <p:sp>
         <p:nvSpPr>
-          <p:cNvPr id="3" name="Shape 1"/>
-          <p:cNvSpPr/>
-          <p:nvPr/>
-        </p:nvSpPr>
-        <p:spPr>
-          <a:xfrm>
-            <a:off x="502920" y="804672"/>
-            <a:ext cx="8138160" cy="0"/>
-          </a:xfrm>
-          <a:prstGeom prst="line">
-            <a:avLst/>
-          </a:prstGeom>
-          <a:noFill/>
-          <a:ln w="22860">
+          <p:cNvPr id="4" name="Shape 2"/>
+          <p:cNvSpPr/>
+          <p:nvPr/>
+        </p:nvSpPr>
+        <p:spPr>
+          <a:xfrm>
+            <a:off x="320040" y="868680"/>
+            <a:ext cx="164592" cy="1645920"/>
+          </a:xfrm>
+          <a:prstGeom prst="rect">
+            <a:avLst/>
+          </a:prstGeom>
+          <a:solidFill>
+            <a:srgbClr val="E50914"/>
+          </a:solidFill>
+          <a:ln w="12700">
             <a:solidFill>
-              <a:srgbClr val="1D4ED8"/>
+              <a:srgbClr val="E50914"/>
             </a:solidFill>
             <a:prstDash val="solid"/>
           </a:ln>
@@ -5851,14 +6390,14 @@
       </p:sp>
       <p:sp>
         <p:nvSpPr>
-          <p:cNvPr id="4" name="Text 2"/>
-          <p:cNvSpPr/>
-          <p:nvPr/>
-        </p:nvSpPr>
-        <p:spPr>
-          <a:xfrm>
-            <a:off x="502920" y="960120"/>
-            <a:ext cx="8229600" cy="548640"/>
+          <p:cNvPr id="5" name="Text 3"/>
+          <p:cNvSpPr/>
+          <p:nvPr/>
+        </p:nvSpPr>
+        <p:spPr>
+          <a:xfrm>
+            <a:off x="594360" y="868680"/>
+            <a:ext cx="8046720" cy="347472"/>
           </a:xfrm>
           <a:prstGeom prst="rect">
             <a:avLst/>
@@ -5871,46 +6410,43 @@
           <a:lstStyle/>
           <a:p>
             <a:pPr marL="0" indent="0">
-              <a:lnSpc>
-                <a:spcPct val="140000"/>
-              </a:lnSpc>
               <a:buNone/>
             </a:pPr>
             <a:r>
-              <a:rPr lang="en-US" sz="1350" dirty="0">
-                <a:solidFill>
-                  <a:srgbClr val="374151"/>
+              <a:rPr lang="en-US" sz="1400" b="1" dirty="0">
+                <a:solidFill>
+                  <a:srgbClr val="0D1B2A"/>
                 </a:solidFill>
                 <a:latin typeface="Calibri" pitchFamily="34" charset="0"/>
                 <a:ea typeface="Calibri" pitchFamily="34" charset="-122"/>
                 <a:cs typeface="Calibri" pitchFamily="34" charset="-120"/>
               </a:rPr>
-              <a:t>Aggregate functions summarize many rows into a single number. You use them with GROUP BY to get results per group.</a:t>
-            </a:r>
-            <a:endParaRPr lang="en-US" sz="1350" dirty="0"/>
+              <a:t>Most Watched Content by Region</a:t>
+            </a:r>
+            <a:endParaRPr lang="en-US" sz="1400" dirty="0"/>
           </a:p>
         </p:txBody>
       </p:sp>
       <p:sp>
         <p:nvSpPr>
-          <p:cNvPr id="5" name="Shape 3"/>
-          <p:cNvSpPr/>
-          <p:nvPr/>
-        </p:nvSpPr>
-        <p:spPr>
-          <a:xfrm>
-            <a:off x="502920" y="1600200"/>
-            <a:ext cx="1572768" cy="640080"/>
+          <p:cNvPr id="6" name="Shape 4"/>
+          <p:cNvSpPr/>
+          <p:nvPr/>
+        </p:nvSpPr>
+        <p:spPr>
+          <a:xfrm>
+            <a:off x="594360" y="1234440"/>
+            <a:ext cx="8229600" cy="1188720"/>
           </a:xfrm>
           <a:prstGeom prst="rect">
             <a:avLst/>
           </a:prstGeom>
           <a:solidFill>
-            <a:srgbClr val="DBEAFE"/>
+            <a:srgbClr val="1A1A2E"/>
           </a:solidFill>
           <a:ln w="12700">
             <a:solidFill>
-              <a:srgbClr val="BFDBFE"/>
+              <a:srgbClr val="E50914"/>
             </a:solidFill>
             <a:prstDash val="solid"/>
           </a:ln>
@@ -5918,14 +6454,14 @@
       </p:sp>
       <p:sp>
         <p:nvSpPr>
-          <p:cNvPr id="6" name="Text 4"/>
-          <p:cNvSpPr/>
-          <p:nvPr/>
-        </p:nvSpPr>
-        <p:spPr>
-          <a:xfrm>
-            <a:off x="548640" y="1645920"/>
-            <a:ext cx="1481328" cy="274320"/>
+          <p:cNvPr id="7" name="Text 5"/>
+          <p:cNvSpPr/>
+          <p:nvPr/>
+        </p:nvSpPr>
+        <p:spPr>
+          <a:xfrm>
+            <a:off x="749808" y="1271016"/>
+            <a:ext cx="7955280" cy="1097280"/>
           </a:xfrm>
           <a:prstGeom prst="rect">
             <a:avLst/>
@@ -5937,34 +6473,144 @@
           <a:bodyPr wrap="square" lIns="0" tIns="0" rIns="0" bIns="0" rtlCol="0" anchor="ctr"/>
           <a:lstStyle/>
           <a:p>
-            <a:pPr marL="0" indent="0" algn="ctr">
+            <a:pPr marL="0" indent="0">
               <a:buNone/>
             </a:pPr>
             <a:r>
-              <a:rPr lang="en-US" sz="1100" b="1" dirty="0">
-                <a:solidFill>
-                  <a:srgbClr val="1D4ED8"/>
-                </a:solidFill>
-                <a:latin typeface="Courier New" pitchFamily="34" charset="0"/>
-                <a:ea typeface="Courier New" pitchFamily="34" charset="-122"/>
-                <a:cs typeface="Courier New" pitchFamily="34" charset="-120"/>
-              </a:rPr>
-              <a:t>COUNT(*)</a:t>
-            </a:r>
-            <a:endParaRPr lang="en-US" sz="1100" dirty="0"/>
+              <a:rPr lang="en-US" sz="1050" dirty="0">
+                <a:solidFill>
+                  <a:srgbClr val="E2F0CB"/>
+                </a:solidFill>
+                <a:latin typeface="Consolas" pitchFamily="34" charset="0"/>
+                <a:ea typeface="Consolas" pitchFamily="34" charset="-122"/>
+                <a:cs typeface="Consolas" pitchFamily="34" charset="-120"/>
+              </a:rPr>
+              <a:t>SELECT content_title, region, COUNT(*) AS views</a:t>
+            </a:r>
+            <a:endParaRPr lang="en-US" sz="1050" dirty="0"/>
+          </a:p>
+          <a:p>
+            <a:pPr marL="0" indent="0">
+              <a:buNone/>
+            </a:pPr>
+            <a:r>
+              <a:rPr lang="en-US" sz="1050" dirty="0">
+                <a:solidFill>
+                  <a:srgbClr val="E2F0CB"/>
+                </a:solidFill>
+                <a:latin typeface="Consolas" pitchFamily="34" charset="0"/>
+                <a:ea typeface="Consolas" pitchFamily="34" charset="-122"/>
+                <a:cs typeface="Consolas" pitchFamily="34" charset="-120"/>
+              </a:rPr>
+              <a:t>FROM streaming_logs</a:t>
+            </a:r>
+            <a:endParaRPr lang="en-US" sz="1050" dirty="0"/>
+          </a:p>
+          <a:p>
+            <a:pPr marL="0" indent="0">
+              <a:buNone/>
+            </a:pPr>
+            <a:r>
+              <a:rPr lang="en-US" sz="1050" dirty="0">
+                <a:solidFill>
+                  <a:srgbClr val="E2F0CB"/>
+                </a:solidFill>
+                <a:latin typeface="Consolas" pitchFamily="34" charset="0"/>
+                <a:ea typeface="Consolas" pitchFamily="34" charset="-122"/>
+                <a:cs typeface="Consolas" pitchFamily="34" charset="-120"/>
+              </a:rPr>
+              <a:t>WHERE streamed_at BETWEEN '2024-01-01' AND '2024-12-31'</a:t>
+            </a:r>
+            <a:endParaRPr lang="en-US" sz="1050" dirty="0"/>
+          </a:p>
+          <a:p>
+            <a:pPr marL="0" indent="0">
+              <a:buNone/>
+            </a:pPr>
+            <a:r>
+              <a:rPr lang="en-US" sz="1050" dirty="0">
+                <a:solidFill>
+                  <a:srgbClr val="E2F0CB"/>
+                </a:solidFill>
+                <a:latin typeface="Consolas" pitchFamily="34" charset="0"/>
+                <a:ea typeface="Consolas" pitchFamily="34" charset="-122"/>
+                <a:cs typeface="Consolas" pitchFamily="34" charset="-120"/>
+              </a:rPr>
+              <a:t>GROUP BY content_title, region</a:t>
+            </a:r>
+            <a:endParaRPr lang="en-US" sz="1050" dirty="0"/>
+          </a:p>
+          <a:p>
+            <a:pPr marL="0" indent="0">
+              <a:buNone/>
+            </a:pPr>
+            <a:r>
+              <a:rPr lang="en-US" sz="1050" dirty="0">
+                <a:solidFill>
+                  <a:srgbClr val="E2F0CB"/>
+                </a:solidFill>
+                <a:latin typeface="Consolas" pitchFamily="34" charset="0"/>
+                <a:ea typeface="Consolas" pitchFamily="34" charset="-122"/>
+                <a:cs typeface="Consolas" pitchFamily="34" charset="-120"/>
+              </a:rPr>
+              <a:t>ORDER BY views DESC</a:t>
+            </a:r>
+            <a:endParaRPr lang="en-US" sz="1050" dirty="0"/>
+          </a:p>
+          <a:p>
+            <a:pPr marL="0" indent="0">
+              <a:buNone/>
+            </a:pPr>
+            <a:r>
+              <a:rPr lang="en-US" sz="1050" dirty="0">
+                <a:solidFill>
+                  <a:srgbClr val="E2F0CB"/>
+                </a:solidFill>
+                <a:latin typeface="Consolas" pitchFamily="34" charset="0"/>
+                <a:ea typeface="Consolas" pitchFamily="34" charset="-122"/>
+                <a:cs typeface="Consolas" pitchFamily="34" charset="-120"/>
+              </a:rPr>
+              <a:t>LIMIT 20;</a:t>
+            </a:r>
+            <a:endParaRPr lang="en-US" sz="1050" dirty="0"/>
           </a:p>
         </p:txBody>
       </p:sp>
       <p:sp>
         <p:nvSpPr>
-          <p:cNvPr id="7" name="Text 5"/>
-          <p:cNvSpPr/>
-          <p:nvPr/>
-        </p:nvSpPr>
-        <p:spPr>
-          <a:xfrm>
-            <a:off x="548640" y="1920240"/>
-            <a:ext cx="1481328" cy="237744"/>
+          <p:cNvPr id="8" name="Shape 6"/>
+          <p:cNvSpPr/>
+          <p:nvPr/>
+        </p:nvSpPr>
+        <p:spPr>
+          <a:xfrm>
+            <a:off x="320040" y="2880360"/>
+            <a:ext cx="164592" cy="1645920"/>
+          </a:xfrm>
+          <a:prstGeom prst="rect">
+            <a:avLst/>
+          </a:prstGeom>
+          <a:solidFill>
+            <a:srgbClr val="E50914"/>
+          </a:solidFill>
+          <a:ln w="12700">
+            <a:solidFill>
+              <a:srgbClr val="E50914"/>
+            </a:solidFill>
+            <a:prstDash val="solid"/>
+          </a:ln>
+        </p:spPr>
+      </p:sp>
+      <p:sp>
+        <p:nvSpPr>
+          <p:cNvPr id="9" name="Text 7"/>
+          <p:cNvSpPr/>
+          <p:nvPr/>
+        </p:nvSpPr>
+        <p:spPr>
+          <a:xfrm>
+            <a:off x="594360" y="2880360"/>
+            <a:ext cx="8046720" cy="347472"/>
           </a:xfrm>
           <a:prstGeom prst="rect">
             <a:avLst/>
@@ -5976,44 +6622,44 @@
           <a:bodyPr wrap="square" lIns="0" tIns="0" rIns="0" bIns="0" rtlCol="0" anchor="ctr"/>
           <a:lstStyle/>
           <a:p>
-            <a:pPr marL="0" indent="0" algn="ctr">
+            <a:pPr marL="0" indent="0">
               <a:buNone/>
             </a:pPr>
             <a:r>
-              <a:rPr lang="en-US" sz="1000" dirty="0">
-                <a:solidFill>
-                  <a:srgbClr val="374151"/>
+              <a:rPr lang="en-US" sz="1400" b="1" dirty="0">
+                <a:solidFill>
+                  <a:srgbClr val="0D1B2A"/>
                 </a:solidFill>
                 <a:latin typeface="Calibri" pitchFamily="34" charset="0"/>
                 <a:ea typeface="Calibri" pitchFamily="34" charset="-122"/>
                 <a:cs typeface="Calibri" pitchFamily="34" charset="-120"/>
               </a:rPr>
-              <a:t>Total rows</a:t>
-            </a:r>
-            <a:endParaRPr lang="en-US" sz="1000" dirty="0"/>
+              <a:t>User Watch History</a:t>
+            </a:r>
+            <a:endParaRPr lang="en-US" sz="1400" dirty="0"/>
           </a:p>
         </p:txBody>
       </p:sp>
       <p:sp>
         <p:nvSpPr>
-          <p:cNvPr id="8" name="Shape 6"/>
-          <p:cNvSpPr/>
-          <p:nvPr/>
-        </p:nvSpPr>
-        <p:spPr>
-          <a:xfrm>
-            <a:off x="2185416" y="1600200"/>
-            <a:ext cx="1572768" cy="640080"/>
+          <p:cNvPr id="10" name="Shape 8"/>
+          <p:cNvSpPr/>
+          <p:nvPr/>
+        </p:nvSpPr>
+        <p:spPr>
+          <a:xfrm>
+            <a:off x="594360" y="3246120"/>
+            <a:ext cx="8229600" cy="1188720"/>
           </a:xfrm>
           <a:prstGeom prst="rect">
             <a:avLst/>
           </a:prstGeom>
           <a:solidFill>
-            <a:srgbClr val="DBEAFE"/>
+            <a:srgbClr val="1A1A2E"/>
           </a:solidFill>
           <a:ln w="12700">
             <a:solidFill>
-              <a:srgbClr val="BFDBFE"/>
+              <a:srgbClr val="E50914"/>
             </a:solidFill>
             <a:prstDash val="solid"/>
           </a:ln>
@@ -6021,14 +6667,14 @@
       </p:sp>
       <p:sp>
         <p:nvSpPr>
-          <p:cNvPr id="9" name="Text 7"/>
-          <p:cNvSpPr/>
-          <p:nvPr/>
-        </p:nvSpPr>
-        <p:spPr>
-          <a:xfrm>
-            <a:off x="2231136" y="1645920"/>
-            <a:ext cx="1481328" cy="274320"/>
+          <p:cNvPr id="11" name="Text 9"/>
+          <p:cNvSpPr/>
+          <p:nvPr/>
+        </p:nvSpPr>
+        <p:spPr>
+          <a:xfrm>
+            <a:off x="749808" y="3282696"/>
+            <a:ext cx="7955280" cy="1097280"/>
           </a:xfrm>
           <a:prstGeom prst="rect">
             <a:avLst/>
@@ -6040,34 +6686,119 @@
           <a:bodyPr wrap="square" lIns="0" tIns="0" rIns="0" bIns="0" rtlCol="0" anchor="ctr"/>
           <a:lstStyle/>
           <a:p>
-            <a:pPr marL="0" indent="0" algn="ctr">
+            <a:pPr marL="0" indent="0">
               <a:buNone/>
             </a:pPr>
             <a:r>
-              <a:rPr lang="en-US" sz="1100" b="1" dirty="0">
-                <a:solidFill>
-                  <a:srgbClr val="1D4ED8"/>
-                </a:solidFill>
-                <a:latin typeface="Courier New" pitchFamily="34" charset="0"/>
-                <a:ea typeface="Courier New" pitchFamily="34" charset="-122"/>
-                <a:cs typeface="Courier New" pitchFamily="34" charset="-120"/>
-              </a:rPr>
-              <a:t>SUM(col)</a:t>
-            </a:r>
-            <a:endParaRPr lang="en-US" sz="1100" dirty="0"/>
+              <a:rPr lang="en-US" sz="1050" dirty="0">
+                <a:solidFill>
+                  <a:srgbClr val="E2F0CB"/>
+                </a:solidFill>
+                <a:latin typeface="Consolas" pitchFamily="34" charset="0"/>
+                <a:ea typeface="Consolas" pitchFamily="34" charset="-122"/>
+                <a:cs typeface="Consolas" pitchFamily="34" charset="-120"/>
+              </a:rPr>
+              <a:t>SELECT u.username, c.title, s.watch_duration, s.completed</a:t>
+            </a:r>
+            <a:endParaRPr lang="en-US" sz="1050" dirty="0"/>
+          </a:p>
+          <a:p>
+            <a:pPr marL="0" indent="0">
+              <a:buNone/>
+            </a:pPr>
+            <a:r>
+              <a:rPr lang="en-US" sz="1050" dirty="0">
+                <a:solidFill>
+                  <a:srgbClr val="E2F0CB"/>
+                </a:solidFill>
+                <a:latin typeface="Consolas" pitchFamily="34" charset="0"/>
+                <a:ea typeface="Consolas" pitchFamily="34" charset="-122"/>
+                <a:cs typeface="Consolas" pitchFamily="34" charset="-120"/>
+              </a:rPr>
+              <a:t>FROM users u</a:t>
+            </a:r>
+            <a:endParaRPr lang="en-US" sz="1050" dirty="0"/>
+          </a:p>
+          <a:p>
+            <a:pPr marL="0" indent="0">
+              <a:buNone/>
+            </a:pPr>
+            <a:r>
+              <a:rPr lang="en-US" sz="1050" dirty="0">
+                <a:solidFill>
+                  <a:srgbClr val="E2F0CB"/>
+                </a:solidFill>
+                <a:latin typeface="Consolas" pitchFamily="34" charset="0"/>
+                <a:ea typeface="Consolas" pitchFamily="34" charset="-122"/>
+                <a:cs typeface="Consolas" pitchFamily="34" charset="-120"/>
+              </a:rPr>
+              <a:t>JOIN sessions s ON u.user_id = s.user_id</a:t>
+            </a:r>
+            <a:endParaRPr lang="en-US" sz="1050" dirty="0"/>
+          </a:p>
+          <a:p>
+            <a:pPr marL="0" indent="0">
+              <a:buNone/>
+            </a:pPr>
+            <a:r>
+              <a:rPr lang="en-US" sz="1050" dirty="0">
+                <a:solidFill>
+                  <a:srgbClr val="E2F0CB"/>
+                </a:solidFill>
+                <a:latin typeface="Consolas" pitchFamily="34" charset="0"/>
+                <a:ea typeface="Consolas" pitchFamily="34" charset="-122"/>
+                <a:cs typeface="Consolas" pitchFamily="34" charset="-120"/>
+              </a:rPr>
+              <a:t>JOIN content c ON s.content_id = c.content_id</a:t>
+            </a:r>
+            <a:endParaRPr lang="en-US" sz="1050" dirty="0"/>
+          </a:p>
+          <a:p>
+            <a:pPr marL="0" indent="0">
+              <a:buNone/>
+            </a:pPr>
+            <a:r>
+              <a:rPr lang="en-US" sz="1050" dirty="0">
+                <a:solidFill>
+                  <a:srgbClr val="E2F0CB"/>
+                </a:solidFill>
+                <a:latin typeface="Consolas" pitchFamily="34" charset="0"/>
+                <a:ea typeface="Consolas" pitchFamily="34" charset="-122"/>
+                <a:cs typeface="Consolas" pitchFamily="34" charset="-120"/>
+              </a:rPr>
+              <a:t>WHERE u.subscription = 'Premium'</a:t>
+            </a:r>
+            <a:endParaRPr lang="en-US" sz="1050" dirty="0"/>
+          </a:p>
+          <a:p>
+            <a:pPr marL="0" indent="0">
+              <a:buNone/>
+            </a:pPr>
+            <a:r>
+              <a:rPr lang="en-US" sz="1050" dirty="0">
+                <a:solidFill>
+                  <a:srgbClr val="E2F0CB"/>
+                </a:solidFill>
+                <a:latin typeface="Consolas" pitchFamily="34" charset="0"/>
+                <a:ea typeface="Consolas" pitchFamily="34" charset="-122"/>
+                <a:cs typeface="Consolas" pitchFamily="34" charset="-120"/>
+              </a:rPr>
+              <a:t>ORDER BY s.streamed_at DESC;</a:t>
+            </a:r>
+            <a:endParaRPr lang="en-US" sz="1050" dirty="0"/>
           </a:p>
         </p:txBody>
       </p:sp>
       <p:sp>
         <p:nvSpPr>
-          <p:cNvPr id="10" name="Text 8"/>
-          <p:cNvSpPr/>
-          <p:nvPr/>
-        </p:nvSpPr>
-        <p:spPr>
-          <a:xfrm>
-            <a:off x="2231136" y="1920240"/>
-            <a:ext cx="1481328" cy="237744"/>
+          <p:cNvPr id="12" name="Text 10"/>
+          <p:cNvSpPr/>
+          <p:nvPr/>
+        </p:nvSpPr>
+        <p:spPr>
+          <a:xfrm>
+            <a:off x="320040" y="4754880"/>
+            <a:ext cx="8503920" cy="292608"/>
           </a:xfrm>
           <a:prstGeom prst="rect">
             <a:avLst/>
@@ -6079,604 +6810,21 @@
           <a:bodyPr wrap="square" lIns="0" tIns="0" rIns="0" bIns="0" rtlCol="0" anchor="ctr"/>
           <a:lstStyle/>
           <a:p>
-            <a:pPr marL="0" indent="0" algn="ctr">
+            <a:pPr marL="0" indent="0">
               <a:buNone/>
             </a:pPr>
             <a:r>
-              <a:rPr lang="en-US" sz="1000" dirty="0">
-                <a:solidFill>
-                  <a:srgbClr val="374151"/>
+              <a:rPr lang="en-US" sz="1100" i="1" dirty="0">
+                <a:solidFill>
+                  <a:srgbClr val="64748B"/>
                 </a:solidFill>
                 <a:latin typeface="Calibri" pitchFamily="34" charset="0"/>
                 <a:ea typeface="Calibri" pitchFamily="34" charset="-122"/>
                 <a:cs typeface="Calibri" pitchFamily="34" charset="-120"/>
               </a:rPr>
-              <a:t>Add all values</a:t>
-            </a:r>
-            <a:endParaRPr lang="en-US" sz="1000" dirty="0"/>
-          </a:p>
-        </p:txBody>
-      </p:sp>
-      <p:sp>
-        <p:nvSpPr>
-          <p:cNvPr id="11" name="Shape 9"/>
-          <p:cNvSpPr/>
-          <p:nvPr/>
-        </p:nvSpPr>
-        <p:spPr>
-          <a:xfrm>
-            <a:off x="3867912" y="1600200"/>
-            <a:ext cx="1572768" cy="640080"/>
-          </a:xfrm>
-          <a:prstGeom prst="rect">
-            <a:avLst/>
-          </a:prstGeom>
-          <a:solidFill>
-            <a:srgbClr val="DBEAFE"/>
-          </a:solidFill>
-          <a:ln w="12700">
-            <a:solidFill>
-              <a:srgbClr val="BFDBFE"/>
-            </a:solidFill>
-            <a:prstDash val="solid"/>
-          </a:ln>
-        </p:spPr>
-      </p:sp>
-      <p:sp>
-        <p:nvSpPr>
-          <p:cNvPr id="12" name="Text 10"/>
-          <p:cNvSpPr/>
-          <p:nvPr/>
-        </p:nvSpPr>
-        <p:spPr>
-          <a:xfrm>
-            <a:off x="3913632" y="1645920"/>
-            <a:ext cx="1481328" cy="274320"/>
-          </a:xfrm>
-          <a:prstGeom prst="rect">
-            <a:avLst/>
-          </a:prstGeom>
-          <a:noFill/>
-          <a:ln/>
-        </p:spPr>
-        <p:txBody>
-          <a:bodyPr wrap="square" lIns="0" tIns="0" rIns="0" bIns="0" rtlCol="0" anchor="ctr"/>
-          <a:lstStyle/>
-          <a:p>
-            <a:pPr marL="0" indent="0" algn="ctr">
-              <a:buNone/>
-            </a:pPr>
-            <a:r>
-              <a:rPr lang="en-US" sz="1100" b="1" dirty="0">
-                <a:solidFill>
-                  <a:srgbClr val="1D4ED8"/>
-                </a:solidFill>
-                <a:latin typeface="Courier New" pitchFamily="34" charset="0"/>
-                <a:ea typeface="Courier New" pitchFamily="34" charset="-122"/>
-                <a:cs typeface="Courier New" pitchFamily="34" charset="-120"/>
-              </a:rPr>
-              <a:t>AVG(col)</a:t>
+              <a:t>Use case: Netflix queries streaming data to fuel its recommendation engine and analyze content performance.</a:t>
             </a:r>
             <a:endParaRPr lang="en-US" sz="1100" dirty="0"/>
-          </a:p>
-        </p:txBody>
-      </p:sp>
-      <p:sp>
-        <p:nvSpPr>
-          <p:cNvPr id="13" name="Text 11"/>
-          <p:cNvSpPr/>
-          <p:nvPr/>
-        </p:nvSpPr>
-        <p:spPr>
-          <a:xfrm>
-            <a:off x="3913632" y="1920240"/>
-            <a:ext cx="1481328" cy="237744"/>
-          </a:xfrm>
-          <a:prstGeom prst="rect">
-            <a:avLst/>
-          </a:prstGeom>
-          <a:noFill/>
-          <a:ln/>
-        </p:spPr>
-        <p:txBody>
-          <a:bodyPr wrap="square" lIns="0" tIns="0" rIns="0" bIns="0" rtlCol="0" anchor="ctr"/>
-          <a:lstStyle/>
-          <a:p>
-            <a:pPr marL="0" indent="0" algn="ctr">
-              <a:buNone/>
-            </a:pPr>
-            <a:r>
-              <a:rPr lang="en-US" sz="1000" dirty="0">
-                <a:solidFill>
-                  <a:srgbClr val="374151"/>
-                </a:solidFill>
-                <a:latin typeface="Calibri" pitchFamily="34" charset="0"/>
-                <a:ea typeface="Calibri" pitchFamily="34" charset="-122"/>
-                <a:cs typeface="Calibri" pitchFamily="34" charset="-120"/>
-              </a:rPr>
-              <a:t>Average</a:t>
-            </a:r>
-            <a:endParaRPr lang="en-US" sz="1000" dirty="0"/>
-          </a:p>
-        </p:txBody>
-      </p:sp>
-      <p:sp>
-        <p:nvSpPr>
-          <p:cNvPr id="14" name="Shape 12"/>
-          <p:cNvSpPr/>
-          <p:nvPr/>
-        </p:nvSpPr>
-        <p:spPr>
-          <a:xfrm>
-            <a:off x="5550408" y="1600200"/>
-            <a:ext cx="1572768" cy="640080"/>
-          </a:xfrm>
-          <a:prstGeom prst="rect">
-            <a:avLst/>
-          </a:prstGeom>
-          <a:solidFill>
-            <a:srgbClr val="DBEAFE"/>
-          </a:solidFill>
-          <a:ln w="12700">
-            <a:solidFill>
-              <a:srgbClr val="BFDBFE"/>
-            </a:solidFill>
-            <a:prstDash val="solid"/>
-          </a:ln>
-        </p:spPr>
-      </p:sp>
-      <p:sp>
-        <p:nvSpPr>
-          <p:cNvPr id="15" name="Text 13"/>
-          <p:cNvSpPr/>
-          <p:nvPr/>
-        </p:nvSpPr>
-        <p:spPr>
-          <a:xfrm>
-            <a:off x="5596128" y="1645920"/>
-            <a:ext cx="1481328" cy="274320"/>
-          </a:xfrm>
-          <a:prstGeom prst="rect">
-            <a:avLst/>
-          </a:prstGeom>
-          <a:noFill/>
-          <a:ln/>
-        </p:spPr>
-        <p:txBody>
-          <a:bodyPr wrap="square" lIns="0" tIns="0" rIns="0" bIns="0" rtlCol="0" anchor="ctr"/>
-          <a:lstStyle/>
-          <a:p>
-            <a:pPr marL="0" indent="0" algn="ctr">
-              <a:buNone/>
-            </a:pPr>
-            <a:r>
-              <a:rPr lang="en-US" sz="1100" b="1" dirty="0">
-                <a:solidFill>
-                  <a:srgbClr val="1D4ED8"/>
-                </a:solidFill>
-                <a:latin typeface="Courier New" pitchFamily="34" charset="0"/>
-                <a:ea typeface="Courier New" pitchFamily="34" charset="-122"/>
-                <a:cs typeface="Courier New" pitchFamily="34" charset="-120"/>
-              </a:rPr>
-              <a:t>MAX(col)</a:t>
-            </a:r>
-            <a:endParaRPr lang="en-US" sz="1100" dirty="0"/>
-          </a:p>
-        </p:txBody>
-      </p:sp>
-      <p:sp>
-        <p:nvSpPr>
-          <p:cNvPr id="16" name="Text 14"/>
-          <p:cNvSpPr/>
-          <p:nvPr/>
-        </p:nvSpPr>
-        <p:spPr>
-          <a:xfrm>
-            <a:off x="5596128" y="1920240"/>
-            <a:ext cx="1481328" cy="237744"/>
-          </a:xfrm>
-          <a:prstGeom prst="rect">
-            <a:avLst/>
-          </a:prstGeom>
-          <a:noFill/>
-          <a:ln/>
-        </p:spPr>
-        <p:txBody>
-          <a:bodyPr wrap="square" lIns="0" tIns="0" rIns="0" bIns="0" rtlCol="0" anchor="ctr"/>
-          <a:lstStyle/>
-          <a:p>
-            <a:pPr marL="0" indent="0" algn="ctr">
-              <a:buNone/>
-            </a:pPr>
-            <a:r>
-              <a:rPr lang="en-US" sz="1000" dirty="0">
-                <a:solidFill>
-                  <a:srgbClr val="374151"/>
-                </a:solidFill>
-                <a:latin typeface="Calibri" pitchFamily="34" charset="0"/>
-                <a:ea typeface="Calibri" pitchFamily="34" charset="-122"/>
-                <a:cs typeface="Calibri" pitchFamily="34" charset="-120"/>
-              </a:rPr>
-              <a:t>Highest value</a:t>
-            </a:r>
-            <a:endParaRPr lang="en-US" sz="1000" dirty="0"/>
-          </a:p>
-        </p:txBody>
-      </p:sp>
-      <p:sp>
-        <p:nvSpPr>
-          <p:cNvPr id="17" name="Shape 15"/>
-          <p:cNvSpPr/>
-          <p:nvPr/>
-        </p:nvSpPr>
-        <p:spPr>
-          <a:xfrm>
-            <a:off x="7232904" y="1600200"/>
-            <a:ext cx="1572768" cy="640080"/>
-          </a:xfrm>
-          <a:prstGeom prst="rect">
-            <a:avLst/>
-          </a:prstGeom>
-          <a:solidFill>
-            <a:srgbClr val="DBEAFE"/>
-          </a:solidFill>
-          <a:ln w="12700">
-            <a:solidFill>
-              <a:srgbClr val="BFDBFE"/>
-            </a:solidFill>
-            <a:prstDash val="solid"/>
-          </a:ln>
-        </p:spPr>
-      </p:sp>
-      <p:sp>
-        <p:nvSpPr>
-          <p:cNvPr id="18" name="Text 16"/>
-          <p:cNvSpPr/>
-          <p:nvPr/>
-        </p:nvSpPr>
-        <p:spPr>
-          <a:xfrm>
-            <a:off x="7278624" y="1645920"/>
-            <a:ext cx="1481328" cy="274320"/>
-          </a:xfrm>
-          <a:prstGeom prst="rect">
-            <a:avLst/>
-          </a:prstGeom>
-          <a:noFill/>
-          <a:ln/>
-        </p:spPr>
-        <p:txBody>
-          <a:bodyPr wrap="square" lIns="0" tIns="0" rIns="0" bIns="0" rtlCol="0" anchor="ctr"/>
-          <a:lstStyle/>
-          <a:p>
-            <a:pPr marL="0" indent="0" algn="ctr">
-              <a:buNone/>
-            </a:pPr>
-            <a:r>
-              <a:rPr lang="en-US" sz="1100" b="1" dirty="0">
-                <a:solidFill>
-                  <a:srgbClr val="1D4ED8"/>
-                </a:solidFill>
-                <a:latin typeface="Courier New" pitchFamily="34" charset="0"/>
-                <a:ea typeface="Courier New" pitchFamily="34" charset="-122"/>
-                <a:cs typeface="Courier New" pitchFamily="34" charset="-120"/>
-              </a:rPr>
-              <a:t>MIN(col)</a:t>
-            </a:r>
-            <a:endParaRPr lang="en-US" sz="1100" dirty="0"/>
-          </a:p>
-        </p:txBody>
-      </p:sp>
-      <p:sp>
-        <p:nvSpPr>
-          <p:cNvPr id="19" name="Text 17"/>
-          <p:cNvSpPr/>
-          <p:nvPr/>
-        </p:nvSpPr>
-        <p:spPr>
-          <a:xfrm>
-            <a:off x="7278624" y="1920240"/>
-            <a:ext cx="1481328" cy="237744"/>
-          </a:xfrm>
-          <a:prstGeom prst="rect">
-            <a:avLst/>
-          </a:prstGeom>
-          <a:noFill/>
-          <a:ln/>
-        </p:spPr>
-        <p:txBody>
-          <a:bodyPr wrap="square" lIns="0" tIns="0" rIns="0" bIns="0" rtlCol="0" anchor="ctr"/>
-          <a:lstStyle/>
-          <a:p>
-            <a:pPr marL="0" indent="0" algn="ctr">
-              <a:buNone/>
-            </a:pPr>
-            <a:r>
-              <a:rPr lang="en-US" sz="1000" dirty="0">
-                <a:solidFill>
-                  <a:srgbClr val="374151"/>
-                </a:solidFill>
-                <a:latin typeface="Calibri" pitchFamily="34" charset="0"/>
-                <a:ea typeface="Calibri" pitchFamily="34" charset="-122"/>
-                <a:cs typeface="Calibri" pitchFamily="34" charset="-120"/>
-              </a:rPr>
-              <a:t>Lowest value</a:t>
-            </a:r>
-            <a:endParaRPr lang="en-US" sz="1000" dirty="0"/>
-          </a:p>
-        </p:txBody>
-      </p:sp>
-      <p:sp>
-        <p:nvSpPr>
-          <p:cNvPr id="20" name="Text 18"/>
-          <p:cNvSpPr/>
-          <p:nvPr/>
-        </p:nvSpPr>
-        <p:spPr>
-          <a:xfrm>
-            <a:off x="502920" y="2395728"/>
-            <a:ext cx="8138160" cy="320040"/>
-          </a:xfrm>
-          <a:prstGeom prst="rect">
-            <a:avLst/>
-          </a:prstGeom>
-          <a:noFill/>
-          <a:ln/>
-        </p:spPr>
-        <p:txBody>
-          <a:bodyPr wrap="square" lIns="0" tIns="0" rIns="0" bIns="0" rtlCol="0" anchor="ctr"/>
-          <a:lstStyle/>
-          <a:p>
-            <a:pPr marL="0" indent="0">
-              <a:buNone/>
-            </a:pPr>
-            <a:r>
-              <a:rPr lang="en-US" sz="1250" i="1" dirty="0">
-                <a:solidFill>
-                  <a:srgbClr val="6B7280"/>
-                </a:solidFill>
-                <a:latin typeface="Calibri" pitchFamily="34" charset="0"/>
-                <a:ea typeface="Calibri" pitchFamily="34" charset="-122"/>
-                <a:cs typeface="Calibri" pitchFamily="34" charset="-120"/>
-              </a:rPr>
-              <a:t>Real query — HR wants average salary and headcount per department:</a:t>
-            </a:r>
-            <a:endParaRPr lang="en-US" sz="1250" dirty="0"/>
-          </a:p>
-        </p:txBody>
-      </p:sp>
-      <p:sp>
-        <p:nvSpPr>
-          <p:cNvPr id="21" name="Shape 19"/>
-          <p:cNvSpPr/>
-          <p:nvPr/>
-        </p:nvSpPr>
-        <p:spPr>
-          <a:xfrm>
-            <a:off x="502920" y="2779776"/>
-            <a:ext cx="8138160" cy="1783080"/>
-          </a:xfrm>
-          <a:prstGeom prst="rect">
-            <a:avLst/>
-          </a:prstGeom>
-          <a:solidFill>
-            <a:srgbClr val="F8F9FA"/>
-          </a:solidFill>
-          <a:ln w="12700">
-            <a:solidFill>
-              <a:srgbClr val="E5E7EB"/>
-            </a:solidFill>
-            <a:prstDash val="solid"/>
-          </a:ln>
-        </p:spPr>
-      </p:sp>
-      <p:sp>
-        <p:nvSpPr>
-          <p:cNvPr id="22" name="Shape 20"/>
-          <p:cNvSpPr/>
-          <p:nvPr/>
-        </p:nvSpPr>
-        <p:spPr>
-          <a:xfrm>
-            <a:off x="502920" y="2779776"/>
-            <a:ext cx="64008" cy="1783080"/>
-          </a:xfrm>
-          <a:prstGeom prst="rect">
-            <a:avLst/>
-          </a:prstGeom>
-          <a:solidFill>
-            <a:srgbClr val="1D4ED8"/>
-          </a:solidFill>
-          <a:ln w="12700">
-            <a:solidFill>
-              <a:srgbClr val="1D4ED8"/>
-            </a:solidFill>
-            <a:prstDash val="solid"/>
-          </a:ln>
-        </p:spPr>
-      </p:sp>
-      <p:sp>
-        <p:nvSpPr>
-          <p:cNvPr id="23" name="Text 21"/>
-          <p:cNvSpPr/>
-          <p:nvPr/>
-        </p:nvSpPr>
-        <p:spPr>
-          <a:xfrm>
-            <a:off x="685800" y="2834640"/>
-            <a:ext cx="7863840" cy="1673352"/>
-          </a:xfrm>
-          <a:prstGeom prst="rect">
-            <a:avLst/>
-          </a:prstGeom>
-          <a:noFill/>
-          <a:ln/>
-        </p:spPr>
-        <p:txBody>
-          <a:bodyPr wrap="square" lIns="0" tIns="0" rIns="0" bIns="0" rtlCol="0" anchor="t"/>
-          <a:lstStyle/>
-          <a:p>
-            <a:pPr marL="0" indent="0">
-              <a:buNone/>
-            </a:pPr>
-            <a:r>
-              <a:rPr lang="en-US" sz="1350" b="1" dirty="0">
-                <a:solidFill>
-                  <a:srgbClr val="1D4ED8"/>
-                </a:solidFill>
-                <a:latin typeface="Courier New" pitchFamily="34" charset="0"/>
-                <a:ea typeface="Courier New" pitchFamily="34" charset="-122"/>
-                <a:cs typeface="Courier New" pitchFamily="34" charset="-120"/>
-              </a:rPr>
-              <a:t>SELECT  </a:t>
-            </a:r>
-            <a:r>
-              <a:rPr lang="en-US" sz="1350" dirty="0">
-                <a:solidFill>
-                  <a:srgbClr val="111827"/>
-                </a:solidFill>
-                <a:latin typeface="Courier New" pitchFamily="34" charset="0"/>
-                <a:ea typeface="Courier New" pitchFamily="34" charset="-122"/>
-                <a:cs typeface="Courier New" pitchFamily="34" charset="-120"/>
-              </a:rPr>
-              <a:t>department, </a:t>
-            </a:r>
-            <a:r>
-              <a:rPr lang="en-US" sz="1350" b="1" dirty="0">
-                <a:solidFill>
-                  <a:srgbClr val="7C3AED"/>
-                </a:solidFill>
-                <a:latin typeface="Courier New" pitchFamily="34" charset="0"/>
-                <a:ea typeface="Courier New" pitchFamily="34" charset="-122"/>
-                <a:cs typeface="Courier New" pitchFamily="34" charset="-120"/>
-              </a:rPr>
-              <a:t>COUNT</a:t>
-            </a:r>
-            <a:r>
-              <a:rPr lang="en-US" sz="1350" dirty="0">
-                <a:solidFill>
-                  <a:srgbClr val="111827"/>
-                </a:solidFill>
-                <a:latin typeface="Courier New" pitchFamily="34" charset="0"/>
-                <a:ea typeface="Courier New" pitchFamily="34" charset="-122"/>
-                <a:cs typeface="Courier New" pitchFamily="34" charset="-120"/>
-              </a:rPr>
-              <a:t>(*) AS headcount, </a:t>
-            </a:r>
-            <a:r>
-              <a:rPr lang="en-US" sz="1350" b="1" dirty="0">
-                <a:solidFill>
-                  <a:srgbClr val="7C3AED"/>
-                </a:solidFill>
-                <a:latin typeface="Courier New" pitchFamily="34" charset="0"/>
-                <a:ea typeface="Courier New" pitchFamily="34" charset="-122"/>
-                <a:cs typeface="Courier New" pitchFamily="34" charset="-120"/>
-              </a:rPr>
-              <a:t>AVG</a:t>
-            </a:r>
-            <a:r>
-              <a:rPr lang="en-US" sz="1350" dirty="0">
-                <a:solidFill>
-                  <a:srgbClr val="111827"/>
-                </a:solidFill>
-                <a:latin typeface="Courier New" pitchFamily="34" charset="0"/>
-                <a:ea typeface="Courier New" pitchFamily="34" charset="-122"/>
-                <a:cs typeface="Courier New" pitchFamily="34" charset="-120"/>
-              </a:rPr>
-              <a:t>(salary) AS avg_salary, </a:t>
-            </a:r>
-            <a:r>
-              <a:rPr lang="en-US" sz="1350" b="1" dirty="0">
-                <a:solidFill>
-                  <a:srgbClr val="7C3AED"/>
-                </a:solidFill>
-                <a:latin typeface="Courier New" pitchFamily="34" charset="0"/>
-                <a:ea typeface="Courier New" pitchFamily="34" charset="-122"/>
-                <a:cs typeface="Courier New" pitchFamily="34" charset="-120"/>
-              </a:rPr>
-              <a:t>MAX</a:t>
-            </a:r>
-            <a:r>
-              <a:rPr lang="en-US" sz="1350" dirty="0">
-                <a:solidFill>
-                  <a:srgbClr val="111827"/>
-                </a:solidFill>
-                <a:latin typeface="Courier New" pitchFamily="34" charset="0"/>
-                <a:ea typeface="Courier New" pitchFamily="34" charset="-122"/>
-                <a:cs typeface="Courier New" pitchFamily="34" charset="-120"/>
-              </a:rPr>
-              <a:t>(salary) AS top_salary
-</a:t>
-            </a:r>
-            <a:r>
-              <a:rPr lang="en-US" sz="1350" b="1" dirty="0">
-                <a:solidFill>
-                  <a:srgbClr val="1D4ED8"/>
-                </a:solidFill>
-                <a:latin typeface="Courier New" pitchFamily="34" charset="0"/>
-                <a:ea typeface="Courier New" pitchFamily="34" charset="-122"/>
-                <a:cs typeface="Courier New" pitchFamily="34" charset="-120"/>
-              </a:rPr>
-              <a:t>FROM    </a:t>
-            </a:r>
-            <a:r>
-              <a:rPr lang="en-US" sz="1350" dirty="0">
-                <a:solidFill>
-                  <a:srgbClr val="111827"/>
-                </a:solidFill>
-                <a:latin typeface="Courier New" pitchFamily="34" charset="0"/>
-                <a:ea typeface="Courier New" pitchFamily="34" charset="-122"/>
-                <a:cs typeface="Courier New" pitchFamily="34" charset="-120"/>
-              </a:rPr>
-              <a:t>employees
-</a:t>
-            </a:r>
-            <a:r>
-              <a:rPr lang="en-US" sz="1350" b="1" dirty="0">
-                <a:solidFill>
-                  <a:srgbClr val="7C3AED"/>
-                </a:solidFill>
-                <a:latin typeface="Courier New" pitchFamily="34" charset="0"/>
-                <a:ea typeface="Courier New" pitchFamily="34" charset="-122"/>
-                <a:cs typeface="Courier New" pitchFamily="34" charset="-120"/>
-              </a:rPr>
-              <a:t>GROUP BY</a:t>
-            </a:r>
-            <a:r>
-              <a:rPr lang="en-US" sz="1350" dirty="0">
-                <a:solidFill>
-                  <a:srgbClr val="111827"/>
-                </a:solidFill>
-                <a:latin typeface="Courier New" pitchFamily="34" charset="0"/>
-                <a:ea typeface="Courier New" pitchFamily="34" charset="-122"/>
-                <a:cs typeface="Courier New" pitchFamily="34" charset="-120"/>
-              </a:rPr>
-              <a:t> department
-</a:t>
-            </a:r>
-            <a:r>
-              <a:rPr lang="en-US" sz="1350" b="1" dirty="0">
-                <a:solidFill>
-                  <a:srgbClr val="7C3AED"/>
-                </a:solidFill>
-                <a:latin typeface="Courier New" pitchFamily="34" charset="0"/>
-                <a:ea typeface="Courier New" pitchFamily="34" charset="-122"/>
-                <a:cs typeface="Courier New" pitchFamily="34" charset="-120"/>
-              </a:rPr>
-              <a:t>ORDER BY</a:t>
-            </a:r>
-            <a:r>
-              <a:rPr lang="en-US" sz="1350" dirty="0">
-                <a:solidFill>
-                  <a:srgbClr val="111827"/>
-                </a:solidFill>
-                <a:latin typeface="Courier New" pitchFamily="34" charset="0"/>
-                <a:ea typeface="Courier New" pitchFamily="34" charset="-122"/>
-                <a:cs typeface="Courier New" pitchFamily="34" charset="-120"/>
-              </a:rPr>
-              <a:t> avg_salary DESC;</a:t>
-            </a:r>
-            <a:endParaRPr lang="en-US" sz="1350" dirty="0"/>
           </a:p>
         </p:txBody>
       </p:sp>
@@ -6685,723 +6833,13 @@
   <p:clrMapOvr>
     <a:masterClrMapping/>
   </p:clrMapOvr>
-  <mc:AlternateContent xmlns:mc="http://schemas.openxmlformats.org/markup-compatibility/2006" xmlns:p14="http://schemas.microsoft.com/office/powerpoint/2010/main">
-    <mc:Choice Requires="p14">
+  <mc:AlternateContent xmlns:mc="http://schemas.openxmlformats.org/markup-compatibility/2006">
+    <mc:Choice xmlns:p14="http://schemas.microsoft.com/office/powerpoint/2010/main" Requires="p14">
       <p:transition spd="slow" p14:dur="800">
         <p:circle/>
       </p:transition>
     </mc:Choice>
-    <mc:Fallback xmlns="">
-      <p:transition spd="slow">
-        <p:circle/>
-      </p:transition>
-    </mc:Fallback>
-  </mc:AlternateContent>
-</p:sld>
-</file>
-
-<file path=ppt/slides/slide7.xml><?xml version="1.0" encoding="utf-8"?>
-<p:sld xmlns:a="http://schemas.openxmlformats.org/drawingml/2006/main" xmlns:r="http://schemas.openxmlformats.org/officeDocument/2006/relationships" xmlns:p="http://schemas.openxmlformats.org/presentationml/2006/main">
-  <p:cSld name="Slide 7">
-    <p:bg>
-      <p:bgPr>
-        <a:solidFill>
-          <a:srgbClr val="FFFFFF"/>
-        </a:solidFill>
-        <a:effectLst/>
-      </p:bgPr>
-    </p:bg>
-    <p:spTree>
-      <p:nvGrpSpPr>
-        <p:cNvPr id="1" name=""/>
-        <p:cNvGrpSpPr/>
-        <p:nvPr/>
-      </p:nvGrpSpPr>
-      <p:grpSpPr>
-        <a:xfrm>
-          <a:off x="0" y="0"/>
-          <a:ext cx="0" cy="0"/>
-          <a:chOff x="0" y="0"/>
-          <a:chExt cx="0" cy="0"/>
-        </a:xfrm>
-      </p:grpSpPr>
-      <p:sp>
-        <p:nvSpPr>
-          <p:cNvPr id="2" name="Text 0"/>
-          <p:cNvSpPr/>
-          <p:nvPr/>
-        </p:nvSpPr>
-        <p:spPr>
-          <a:xfrm>
-            <a:off x="502920" y="256032"/>
-            <a:ext cx="8138160" cy="502920"/>
-          </a:xfrm>
-          <a:prstGeom prst="rect">
-            <a:avLst/>
-          </a:prstGeom>
-          <a:noFill/>
-          <a:ln/>
-        </p:spPr>
-        <p:txBody>
-          <a:bodyPr wrap="square" lIns="0" tIns="0" rIns="0" bIns="0" rtlCol="0" anchor="ctr"/>
-          <a:lstStyle/>
-          <a:p>
-            <a:pPr marL="0" indent="0">
-              <a:buNone/>
-            </a:pPr>
-            <a:r>
-              <a:rPr lang="en-US" sz="2700" b="1" dirty="0">
-                <a:solidFill>
-                  <a:srgbClr val="111827"/>
-                </a:solidFill>
-                <a:latin typeface="Calibri" pitchFamily="34" charset="0"/>
-                <a:ea typeface="Calibri" pitchFamily="34" charset="-122"/>
-                <a:cs typeface="Calibri" pitchFamily="34" charset="-120"/>
-              </a:rPr>
-              <a:t>SELECT with JOIN</a:t>
-            </a:r>
-            <a:endParaRPr lang="en-US" sz="2700" dirty="0"/>
-          </a:p>
-        </p:txBody>
-      </p:sp>
-      <p:sp>
-        <p:nvSpPr>
-          <p:cNvPr id="3" name="Shape 1"/>
-          <p:cNvSpPr/>
-          <p:nvPr/>
-        </p:nvSpPr>
-        <p:spPr>
-          <a:xfrm>
-            <a:off x="502920" y="804672"/>
-            <a:ext cx="8138160" cy="0"/>
-          </a:xfrm>
-          <a:prstGeom prst="line">
-            <a:avLst/>
-          </a:prstGeom>
-          <a:noFill/>
-          <a:ln w="22860">
-            <a:solidFill>
-              <a:srgbClr val="1D4ED8"/>
-            </a:solidFill>
-            <a:prstDash val="solid"/>
-          </a:ln>
-        </p:spPr>
-      </p:sp>
-      <p:sp>
-        <p:nvSpPr>
-          <p:cNvPr id="4" name="Text 2"/>
-          <p:cNvSpPr/>
-          <p:nvPr/>
-        </p:nvSpPr>
-        <p:spPr>
-          <a:xfrm>
-            <a:off x="502920" y="960120"/>
-            <a:ext cx="8138160" cy="384048"/>
-          </a:xfrm>
-          <a:prstGeom prst="rect">
-            <a:avLst/>
-          </a:prstGeom>
-          <a:noFill/>
-          <a:ln/>
-        </p:spPr>
-        <p:txBody>
-          <a:bodyPr wrap="square" lIns="0" tIns="0" rIns="0" bIns="0" rtlCol="0" anchor="ctr"/>
-          <a:lstStyle/>
-          <a:p>
-            <a:pPr marL="0" indent="0">
-              <a:lnSpc>
-                <a:spcPct val="140000"/>
-              </a:lnSpc>
-              <a:buNone/>
-            </a:pPr>
-            <a:r>
-              <a:rPr lang="en-US" sz="1350" dirty="0">
-                <a:solidFill>
-                  <a:srgbClr val="374151"/>
-                </a:solidFill>
-                <a:latin typeface="Calibri" pitchFamily="34" charset="0"/>
-                <a:ea typeface="Calibri" pitchFamily="34" charset="-122"/>
-                <a:cs typeface="Calibri" pitchFamily="34" charset="-120"/>
-              </a:rPr>
-              <a:t>A JOIN lets you combine rows from two tables based on a related column. Most real queries use JOINs.</a:t>
-            </a:r>
-            <a:endParaRPr lang="en-US" sz="1350" dirty="0"/>
-          </a:p>
-        </p:txBody>
-      </p:sp>
-      <p:sp>
-        <p:nvSpPr>
-          <p:cNvPr id="5" name="Text 3"/>
-          <p:cNvSpPr/>
-          <p:nvPr/>
-        </p:nvSpPr>
-        <p:spPr>
-          <a:xfrm>
-            <a:off x="502920" y="1444752"/>
-            <a:ext cx="8138160" cy="292608"/>
-          </a:xfrm>
-          <a:prstGeom prst="rect">
-            <a:avLst/>
-          </a:prstGeom>
-          <a:noFill/>
-          <a:ln/>
-        </p:spPr>
-        <p:txBody>
-          <a:bodyPr wrap="square" lIns="0" tIns="0" rIns="0" bIns="0" rtlCol="0" anchor="ctr"/>
-          <a:lstStyle/>
-          <a:p>
-            <a:pPr marL="0" indent="0">
-              <a:buNone/>
-            </a:pPr>
-            <a:r>
-              <a:rPr lang="en-US" sz="1250" i="1" dirty="0">
-                <a:solidFill>
-                  <a:srgbClr val="6B7280"/>
-                </a:solidFill>
-                <a:latin typeface="Calibri" pitchFamily="34" charset="0"/>
-                <a:ea typeface="Calibri" pitchFamily="34" charset="-122"/>
-                <a:cs typeface="Calibri" pitchFamily="34" charset="-120"/>
-              </a:rPr>
-              <a:t>Real query — get customer name and their order details:</a:t>
-            </a:r>
-            <a:endParaRPr lang="en-US" sz="1250" dirty="0"/>
-          </a:p>
-        </p:txBody>
-      </p:sp>
-      <p:sp>
-        <p:nvSpPr>
-          <p:cNvPr id="6" name="Shape 4"/>
-          <p:cNvSpPr/>
-          <p:nvPr/>
-        </p:nvSpPr>
-        <p:spPr>
-          <a:xfrm>
-            <a:off x="502920" y="1783080"/>
-            <a:ext cx="8138160" cy="1481328"/>
-          </a:xfrm>
-          <a:prstGeom prst="rect">
-            <a:avLst/>
-          </a:prstGeom>
-          <a:solidFill>
-            <a:srgbClr val="F8F9FA"/>
-          </a:solidFill>
-          <a:ln w="12700">
-            <a:solidFill>
-              <a:srgbClr val="E5E7EB"/>
-            </a:solidFill>
-            <a:prstDash val="solid"/>
-          </a:ln>
-        </p:spPr>
-      </p:sp>
-      <p:sp>
-        <p:nvSpPr>
-          <p:cNvPr id="7" name="Shape 5"/>
-          <p:cNvSpPr/>
-          <p:nvPr/>
-        </p:nvSpPr>
-        <p:spPr>
-          <a:xfrm>
-            <a:off x="502920" y="1783080"/>
-            <a:ext cx="64008" cy="1481328"/>
-          </a:xfrm>
-          <a:prstGeom prst="rect">
-            <a:avLst/>
-          </a:prstGeom>
-          <a:solidFill>
-            <a:srgbClr val="1D4ED8"/>
-          </a:solidFill>
-          <a:ln w="12700">
-            <a:solidFill>
-              <a:srgbClr val="1D4ED8"/>
-            </a:solidFill>
-            <a:prstDash val="solid"/>
-          </a:ln>
-        </p:spPr>
-      </p:sp>
-      <p:sp>
-        <p:nvSpPr>
-          <p:cNvPr id="8" name="Text 6"/>
-          <p:cNvSpPr/>
-          <p:nvPr/>
-        </p:nvSpPr>
-        <p:spPr>
-          <a:xfrm>
-            <a:off x="685800" y="1837944"/>
-            <a:ext cx="7863840" cy="1371600"/>
-          </a:xfrm>
-          <a:prstGeom prst="rect">
-            <a:avLst/>
-          </a:prstGeom>
-          <a:noFill/>
-          <a:ln/>
-        </p:spPr>
-        <p:txBody>
-          <a:bodyPr wrap="square" lIns="0" tIns="0" rIns="0" bIns="0" rtlCol="0" anchor="t"/>
-          <a:lstStyle/>
-          <a:p>
-            <a:pPr marL="0" indent="0">
-              <a:buNone/>
-            </a:pPr>
-            <a:r>
-              <a:rPr lang="en-US" sz="1350" b="1" dirty="0">
-                <a:solidFill>
-                  <a:srgbClr val="1D4ED8"/>
-                </a:solidFill>
-                <a:latin typeface="Courier New" pitchFamily="34" charset="0"/>
-                <a:ea typeface="Courier New" pitchFamily="34" charset="-122"/>
-                <a:cs typeface="Courier New" pitchFamily="34" charset="-120"/>
-              </a:rPr>
-              <a:t>SELECT  </a:t>
-            </a:r>
-            <a:r>
-              <a:rPr lang="en-US" sz="1350" dirty="0">
-                <a:solidFill>
-                  <a:srgbClr val="111827"/>
-                </a:solidFill>
-                <a:latin typeface="Courier New" pitchFamily="34" charset="0"/>
-                <a:ea typeface="Courier New" pitchFamily="34" charset="-122"/>
-                <a:cs typeface="Courier New" pitchFamily="34" charset="-120"/>
-              </a:rPr>
-              <a:t>c.name, c.city, o.order_id, o.amount, o.status
-</a:t>
-            </a:r>
-            <a:r>
-              <a:rPr lang="en-US" sz="1350" b="1" dirty="0">
-                <a:solidFill>
-                  <a:srgbClr val="1D4ED8"/>
-                </a:solidFill>
-                <a:latin typeface="Courier New" pitchFamily="34" charset="0"/>
-                <a:ea typeface="Courier New" pitchFamily="34" charset="-122"/>
-                <a:cs typeface="Courier New" pitchFamily="34" charset="-120"/>
-              </a:rPr>
-              <a:t>FROM    </a:t>
-            </a:r>
-            <a:r>
-              <a:rPr lang="en-US" sz="1350" dirty="0">
-                <a:solidFill>
-                  <a:srgbClr val="111827"/>
-                </a:solidFill>
-                <a:latin typeface="Courier New" pitchFamily="34" charset="0"/>
-                <a:ea typeface="Courier New" pitchFamily="34" charset="-122"/>
-                <a:cs typeface="Courier New" pitchFamily="34" charset="-120"/>
-              </a:rPr>
-              <a:t>customers c
-</a:t>
-            </a:r>
-            <a:r>
-              <a:rPr lang="en-US" sz="1350" b="1" dirty="0">
-                <a:solidFill>
-                  <a:srgbClr val="1D4ED8"/>
-                </a:solidFill>
-                <a:latin typeface="Courier New" pitchFamily="34" charset="0"/>
-                <a:ea typeface="Courier New" pitchFamily="34" charset="-122"/>
-                <a:cs typeface="Courier New" pitchFamily="34" charset="-120"/>
-              </a:rPr>
-              <a:t>JOIN    </a:t>
-            </a:r>
-            <a:r>
-              <a:rPr lang="en-US" sz="1350" dirty="0">
-                <a:solidFill>
-                  <a:srgbClr val="111827"/>
-                </a:solidFill>
-                <a:latin typeface="Courier New" pitchFamily="34" charset="0"/>
-                <a:ea typeface="Courier New" pitchFamily="34" charset="-122"/>
-                <a:cs typeface="Courier New" pitchFamily="34" charset="-120"/>
-              </a:rPr>
-              <a:t>orders o  ON  c.customer_id = o.customer_id
-</a:t>
-            </a:r>
-            <a:r>
-              <a:rPr lang="en-US" sz="1350" b="1" dirty="0">
-                <a:solidFill>
-                  <a:srgbClr val="7C3AED"/>
-                </a:solidFill>
-                <a:latin typeface="Courier New" pitchFamily="34" charset="0"/>
-                <a:ea typeface="Courier New" pitchFamily="34" charset="-122"/>
-                <a:cs typeface="Courier New" pitchFamily="34" charset="-120"/>
-              </a:rPr>
-              <a:t>WHERE   </a:t>
-            </a:r>
-            <a:r>
-              <a:rPr lang="en-US" sz="1350" dirty="0">
-                <a:solidFill>
-                  <a:srgbClr val="111827"/>
-                </a:solidFill>
-                <a:latin typeface="Courier New" pitchFamily="34" charset="0"/>
-                <a:ea typeface="Courier New" pitchFamily="34" charset="-122"/>
-                <a:cs typeface="Courier New" pitchFamily="34" charset="-120"/>
-              </a:rPr>
-              <a:t>o.status = </a:t>
-            </a:r>
-            <a:r>
-              <a:rPr lang="en-US" sz="1350" dirty="0">
-                <a:solidFill>
-                  <a:srgbClr val="DC2626"/>
-                </a:solidFill>
-                <a:latin typeface="Courier New" pitchFamily="34" charset="0"/>
-                <a:ea typeface="Courier New" pitchFamily="34" charset="-122"/>
-                <a:cs typeface="Courier New" pitchFamily="34" charset="-120"/>
-              </a:rPr>
-              <a:t>'Delivered'</a:t>
-            </a:r>
-            <a:r>
-              <a:rPr lang="en-US" sz="1350" dirty="0">
-                <a:solidFill>
-                  <a:srgbClr val="111827"/>
-                </a:solidFill>
-                <a:latin typeface="Courier New" pitchFamily="34" charset="0"/>
-                <a:ea typeface="Courier New" pitchFamily="34" charset="-122"/>
-                <a:cs typeface="Courier New" pitchFamily="34" charset="-120"/>
-              </a:rPr>
-              <a:t>  AND  c.city = </a:t>
-            </a:r>
-            <a:r>
-              <a:rPr lang="en-US" sz="1350" dirty="0">
-                <a:solidFill>
-                  <a:srgbClr val="DC2626"/>
-                </a:solidFill>
-                <a:latin typeface="Courier New" pitchFamily="34" charset="0"/>
-                <a:ea typeface="Courier New" pitchFamily="34" charset="-122"/>
-                <a:cs typeface="Courier New" pitchFamily="34" charset="-120"/>
-              </a:rPr>
-              <a:t>'Mumbai'</a:t>
-            </a:r>
-            <a:r>
-              <a:rPr lang="en-US" sz="1350" dirty="0">
-                <a:solidFill>
-                  <a:srgbClr val="111827"/>
-                </a:solidFill>
-                <a:latin typeface="Courier New" pitchFamily="34" charset="0"/>
-                <a:ea typeface="Courier New" pitchFamily="34" charset="-122"/>
-                <a:cs typeface="Courier New" pitchFamily="34" charset="-120"/>
-              </a:rPr>
-              <a:t>;</a:t>
-            </a:r>
-            <a:endParaRPr lang="en-US" sz="1350" dirty="0"/>
-          </a:p>
-        </p:txBody>
-      </p:sp>
-      <p:sp>
-        <p:nvSpPr>
-          <p:cNvPr id="9" name="Shape 7"/>
-          <p:cNvSpPr/>
-          <p:nvPr/>
-        </p:nvSpPr>
-        <p:spPr>
-          <a:xfrm>
-            <a:off x="502920" y="3401568"/>
-            <a:ext cx="54864" cy="438912"/>
-          </a:xfrm>
-          <a:prstGeom prst="rect">
-            <a:avLst/>
-          </a:prstGeom>
-          <a:solidFill>
-            <a:srgbClr val="1D4ED8"/>
-          </a:solidFill>
-          <a:ln w="12700">
-            <a:solidFill>
-              <a:srgbClr val="1D4ED8"/>
-            </a:solidFill>
-            <a:prstDash val="solid"/>
-          </a:ln>
-        </p:spPr>
-      </p:sp>
-      <p:sp>
-        <p:nvSpPr>
-          <p:cNvPr id="10" name="Text 8"/>
-          <p:cNvSpPr/>
-          <p:nvPr/>
-        </p:nvSpPr>
-        <p:spPr>
-          <a:xfrm>
-            <a:off x="685800" y="3447288"/>
-            <a:ext cx="1920240" cy="347472"/>
-          </a:xfrm>
-          <a:prstGeom prst="rect">
-            <a:avLst/>
-          </a:prstGeom>
-          <a:noFill/>
-          <a:ln/>
-        </p:spPr>
-        <p:txBody>
-          <a:bodyPr wrap="square" lIns="0" tIns="0" rIns="0" bIns="0" rtlCol="0" anchor="ctr"/>
-          <a:lstStyle/>
-          <a:p>
-            <a:pPr marL="0" indent="0">
-              <a:buNone/>
-            </a:pPr>
-            <a:r>
-              <a:rPr lang="en-US" sz="1300" b="1" dirty="0">
-                <a:solidFill>
-                  <a:srgbClr val="1D4ED8"/>
-                </a:solidFill>
-                <a:latin typeface="Courier New" pitchFamily="34" charset="0"/>
-                <a:ea typeface="Courier New" pitchFamily="34" charset="-122"/>
-                <a:cs typeface="Courier New" pitchFamily="34" charset="-120"/>
-              </a:rPr>
-              <a:t>INNER JOIN</a:t>
-            </a:r>
-            <a:endParaRPr lang="en-US" sz="1300" dirty="0"/>
-          </a:p>
-        </p:txBody>
-      </p:sp>
-      <p:sp>
-        <p:nvSpPr>
-          <p:cNvPr id="11" name="Text 9"/>
-          <p:cNvSpPr/>
-          <p:nvPr/>
-        </p:nvSpPr>
-        <p:spPr>
-          <a:xfrm>
-            <a:off x="2697480" y="3447288"/>
-            <a:ext cx="5852160" cy="347472"/>
-          </a:xfrm>
-          <a:prstGeom prst="rect">
-            <a:avLst/>
-          </a:prstGeom>
-          <a:noFill/>
-          <a:ln/>
-        </p:spPr>
-        <p:txBody>
-          <a:bodyPr wrap="square" lIns="0" tIns="0" rIns="0" bIns="0" rtlCol="0" anchor="ctr"/>
-          <a:lstStyle/>
-          <a:p>
-            <a:pPr marL="0" indent="0">
-              <a:buNone/>
-            </a:pPr>
-            <a:r>
-              <a:rPr lang="en-US" sz="1300" dirty="0">
-                <a:solidFill>
-                  <a:srgbClr val="374151"/>
-                </a:solidFill>
-                <a:latin typeface="Calibri" pitchFamily="34" charset="0"/>
-                <a:ea typeface="Calibri" pitchFamily="34" charset="-122"/>
-                <a:cs typeface="Calibri" pitchFamily="34" charset="-120"/>
-              </a:rPr>
-              <a:t>—  Only rows that match in BOTH tables</a:t>
-            </a:r>
-            <a:endParaRPr lang="en-US" sz="1300" dirty="0"/>
-          </a:p>
-        </p:txBody>
-      </p:sp>
-      <p:sp>
-        <p:nvSpPr>
-          <p:cNvPr id="12" name="Shape 10"/>
-          <p:cNvSpPr/>
-          <p:nvPr/>
-        </p:nvSpPr>
-        <p:spPr>
-          <a:xfrm>
-            <a:off x="502920" y="3950208"/>
-            <a:ext cx="54864" cy="438912"/>
-          </a:xfrm>
-          <a:prstGeom prst="rect">
-            <a:avLst/>
-          </a:prstGeom>
-          <a:solidFill>
-            <a:srgbClr val="1D4ED8"/>
-          </a:solidFill>
-          <a:ln w="12700">
-            <a:solidFill>
-              <a:srgbClr val="1D4ED8"/>
-            </a:solidFill>
-            <a:prstDash val="solid"/>
-          </a:ln>
-        </p:spPr>
-      </p:sp>
-      <p:sp>
-        <p:nvSpPr>
-          <p:cNvPr id="13" name="Text 11"/>
-          <p:cNvSpPr/>
-          <p:nvPr/>
-        </p:nvSpPr>
-        <p:spPr>
-          <a:xfrm>
-            <a:off x="685800" y="3995928"/>
-            <a:ext cx="1920240" cy="347472"/>
-          </a:xfrm>
-          <a:prstGeom prst="rect">
-            <a:avLst/>
-          </a:prstGeom>
-          <a:noFill/>
-          <a:ln/>
-        </p:spPr>
-        <p:txBody>
-          <a:bodyPr wrap="square" lIns="0" tIns="0" rIns="0" bIns="0" rtlCol="0" anchor="ctr"/>
-          <a:lstStyle/>
-          <a:p>
-            <a:pPr marL="0" indent="0">
-              <a:buNone/>
-            </a:pPr>
-            <a:r>
-              <a:rPr lang="en-US" sz="1300" b="1" dirty="0">
-                <a:solidFill>
-                  <a:srgbClr val="1D4ED8"/>
-                </a:solidFill>
-                <a:latin typeface="Courier New" pitchFamily="34" charset="0"/>
-                <a:ea typeface="Courier New" pitchFamily="34" charset="-122"/>
-                <a:cs typeface="Courier New" pitchFamily="34" charset="-120"/>
-              </a:rPr>
-              <a:t>LEFT JOIN</a:t>
-            </a:r>
-            <a:endParaRPr lang="en-US" sz="1300" dirty="0"/>
-          </a:p>
-        </p:txBody>
-      </p:sp>
-      <p:sp>
-        <p:nvSpPr>
-          <p:cNvPr id="14" name="Text 12"/>
-          <p:cNvSpPr/>
-          <p:nvPr/>
-        </p:nvSpPr>
-        <p:spPr>
-          <a:xfrm>
-            <a:off x="2697480" y="3995928"/>
-            <a:ext cx="5852160" cy="347472"/>
-          </a:xfrm>
-          <a:prstGeom prst="rect">
-            <a:avLst/>
-          </a:prstGeom>
-          <a:noFill/>
-          <a:ln/>
-        </p:spPr>
-        <p:txBody>
-          <a:bodyPr wrap="square" lIns="0" tIns="0" rIns="0" bIns="0" rtlCol="0" anchor="ctr"/>
-          <a:lstStyle/>
-          <a:p>
-            <a:pPr marL="0" indent="0">
-              <a:buNone/>
-            </a:pPr>
-            <a:r>
-              <a:rPr lang="en-US" sz="1300" dirty="0">
-                <a:solidFill>
-                  <a:srgbClr val="374151"/>
-                </a:solidFill>
-                <a:latin typeface="Calibri" pitchFamily="34" charset="0"/>
-                <a:ea typeface="Calibri" pitchFamily="34" charset="-122"/>
-                <a:cs typeface="Calibri" pitchFamily="34" charset="-120"/>
-              </a:rPr>
-              <a:t>—  All rows from the left table + matching rows from the right (nulls if no match)</a:t>
-            </a:r>
-            <a:endParaRPr lang="en-US" sz="1300" dirty="0"/>
-          </a:p>
-        </p:txBody>
-      </p:sp>
-      <p:sp>
-        <p:nvSpPr>
-          <p:cNvPr id="15" name="Shape 13"/>
-          <p:cNvSpPr/>
-          <p:nvPr/>
-        </p:nvSpPr>
-        <p:spPr>
-          <a:xfrm>
-            <a:off x="502920" y="4498848"/>
-            <a:ext cx="54864" cy="438912"/>
-          </a:xfrm>
-          <a:prstGeom prst="rect">
-            <a:avLst/>
-          </a:prstGeom>
-          <a:solidFill>
-            <a:srgbClr val="1D4ED8"/>
-          </a:solidFill>
-          <a:ln w="12700">
-            <a:solidFill>
-              <a:srgbClr val="1D4ED8"/>
-            </a:solidFill>
-            <a:prstDash val="solid"/>
-          </a:ln>
-        </p:spPr>
-      </p:sp>
-      <p:sp>
-        <p:nvSpPr>
-          <p:cNvPr id="16" name="Text 14"/>
-          <p:cNvSpPr/>
-          <p:nvPr/>
-        </p:nvSpPr>
-        <p:spPr>
-          <a:xfrm>
-            <a:off x="685800" y="4544568"/>
-            <a:ext cx="1920240" cy="347472"/>
-          </a:xfrm>
-          <a:prstGeom prst="rect">
-            <a:avLst/>
-          </a:prstGeom>
-          <a:noFill/>
-          <a:ln/>
-        </p:spPr>
-        <p:txBody>
-          <a:bodyPr wrap="square" lIns="0" tIns="0" rIns="0" bIns="0" rtlCol="0" anchor="ctr"/>
-          <a:lstStyle/>
-          <a:p>
-            <a:pPr marL="0" indent="0">
-              <a:buNone/>
-            </a:pPr>
-            <a:r>
-              <a:rPr lang="en-US" sz="1300" b="1" dirty="0">
-                <a:solidFill>
-                  <a:srgbClr val="1D4ED8"/>
-                </a:solidFill>
-                <a:latin typeface="Courier New" pitchFamily="34" charset="0"/>
-                <a:ea typeface="Courier New" pitchFamily="34" charset="-122"/>
-                <a:cs typeface="Courier New" pitchFamily="34" charset="-120"/>
-              </a:rPr>
-              <a:t>RIGHT JOIN</a:t>
-            </a:r>
-            <a:endParaRPr lang="en-US" sz="1300" dirty="0"/>
-          </a:p>
-        </p:txBody>
-      </p:sp>
-      <p:sp>
-        <p:nvSpPr>
-          <p:cNvPr id="17" name="Text 15"/>
-          <p:cNvSpPr/>
-          <p:nvPr/>
-        </p:nvSpPr>
-        <p:spPr>
-          <a:xfrm>
-            <a:off x="2697480" y="4544568"/>
-            <a:ext cx="5852160" cy="347472"/>
-          </a:xfrm>
-          <a:prstGeom prst="rect">
-            <a:avLst/>
-          </a:prstGeom>
-          <a:noFill/>
-          <a:ln/>
-        </p:spPr>
-        <p:txBody>
-          <a:bodyPr wrap="square" lIns="0" tIns="0" rIns="0" bIns="0" rtlCol="0" anchor="ctr"/>
-          <a:lstStyle/>
-          <a:p>
-            <a:pPr marL="0" indent="0">
-              <a:buNone/>
-            </a:pPr>
-            <a:r>
-              <a:rPr lang="en-US" sz="1300" dirty="0">
-                <a:solidFill>
-                  <a:srgbClr val="374151"/>
-                </a:solidFill>
-                <a:latin typeface="Calibri" pitchFamily="34" charset="0"/>
-                <a:ea typeface="Calibri" pitchFamily="34" charset="-122"/>
-                <a:cs typeface="Calibri" pitchFamily="34" charset="-120"/>
-              </a:rPr>
-              <a:t>—  All rows from the right table + matching rows from the left</a:t>
-            </a:r>
-            <a:endParaRPr lang="en-US" sz="1300" dirty="0"/>
-          </a:p>
-        </p:txBody>
-      </p:sp>
-    </p:spTree>
-  </p:cSld>
-  <p:clrMapOvr>
-    <a:masterClrMapping/>
-  </p:clrMapOvr>
-  <mc:AlternateContent xmlns:mc="http://schemas.openxmlformats.org/markup-compatibility/2006" xmlns:p14="http://schemas.microsoft.com/office/powerpoint/2010/main">
-    <mc:Choice Requires="p14">
-      <p:transition spd="slow" p14:dur="800">
-        <p:circle/>
-      </p:transition>
-    </mc:Choice>
-    <mc:Fallback xmlns="">
+    <mc:Fallback>
       <p:transition spd="slow">
         <p:circle/>
       </p:transition>
@@ -7441,8 +6879,8 @@
         </p:nvSpPr>
         <p:spPr>
           <a:xfrm>
-            <a:off x="902524" y="785257"/>
-            <a:ext cx="7487392" cy="3371107"/>
+            <a:off x="902524" y="110589"/>
+            <a:ext cx="7487392" cy="4922322"/>
           </a:xfrm>
           <a:prstGeom prst="ellipse">
             <a:avLst/>
@@ -7473,12 +6911,8 @@
                   <a:srgbClr val="8899AA"/>
                 </a:solidFill>
               </a:rPr>
-              <a:t>Thank You! Questions Welcome 🙌</a:t>
-            </a:r>
-            <a:endParaRPr lang="en-US" dirty="0"/>
-          </a:p>
-          <a:p>
-            <a:pPr algn="ctr"/>
+              <a:t>Thank You! </a:t>
+            </a:r>
             <a:endParaRPr lang="en-IN" dirty="0"/>
           </a:p>
         </p:txBody>
